--- a/docs/presentation.pptx
+++ b/docs/presentation.pptx
@@ -3292,7 +3292,7 @@
             <a:r>
               <a:rPr sz="1400" b="0" i="0">
                 <a:solidFill>
-                  <a:srgbClr val="75726B"/>
+                  <a:srgbClr val="6A675F"/>
                 </a:solidFill>
                 <a:latin typeface="IBM Plex Sans"/>
               </a:rPr>
@@ -3309,7 +3309,7 @@
         </p:nvSpPr>
         <p:spPr>
           <a:xfrm>
-            <a:off x="822960" y="5760720"/>
+            <a:off x="822960" y="4983480"/>
             <a:ext cx="10058400" cy="365760"/>
           </a:xfrm>
           <a:prstGeom prst="rect">
@@ -3329,13 +3329,91 @@
               </a:lnSpc>
             </a:pPr>
             <a:r>
-              <a:rPr sz="1200" b="0" i="0">
-                <a:solidFill>
-                  <a:srgbClr val="75726B"/>
-                </a:solidFill>
-                <a:latin typeface="IBM Plex Sans"/>
-              </a:rPr>
-              <a:t>&lt;TeamName&gt;, &lt;CollegeName&gt;.  Prativimb is Sanskrit for reflection. All patient data shown is synthetic.</a:t>
+              <a:rPr sz="1500" b="0" i="0">
+                <a:solidFill>
+                  <a:srgbClr val="1B1B19"/>
+                </a:solidFill>
+                <a:latin typeface="IBM Plex Sans"/>
+              </a:rPr>
+              <a:t>&lt;TeamName&gt;, &lt;CollegeName&gt; / &lt;Incubator&gt;</a:t>
+            </a:r>
+          </a:p>
+        </p:txBody>
+      </p:sp>
+      <p:sp>
+        <p:nvSpPr>
+          <p:cNvPr id="8" name="TextBox 7"/>
+          <p:cNvSpPr txBox="1"/>
+          <p:nvPr/>
+        </p:nvSpPr>
+        <p:spPr>
+          <a:xfrm>
+            <a:off x="822960" y="5394960"/>
+            <a:ext cx="10515600" cy="365760"/>
+          </a:xfrm>
+          <a:prstGeom prst="rect">
+            <a:avLst/>
+          </a:prstGeom>
+          <a:noFill/>
+        </p:spPr>
+        <p:txBody>
+          <a:bodyPr wrap="none" lIns="0" rIns="0" tIns="0" bIns="0">
+            <a:spAutoFit/>
+          </a:bodyPr>
+          <a:lstStyle/>
+          <a:p>
+            <a:pPr>
+              <a:lnSpc>
+                <a:spcPct val="135000"/>
+              </a:lnSpc>
+            </a:pPr>
+            <a:r>
+              <a:rPr sz="1250" b="0" i="0">
+                <a:solidFill>
+                  <a:srgbClr val="4A4843"/>
+                </a:solidFill>
+                <a:latin typeface="IBM Plex Sans"/>
+              </a:rPr>
+              <a:t>&lt;Member 1, role&gt;   &lt;Member 2, role&gt;   &lt;Member 3, role&gt;   &lt;Member 4, role&gt;   &lt;team email&gt;</a:t>
+            </a:r>
+          </a:p>
+        </p:txBody>
+      </p:sp>
+      <p:sp>
+        <p:nvSpPr>
+          <p:cNvPr id="9" name="TextBox 8"/>
+          <p:cNvSpPr txBox="1"/>
+          <p:nvPr/>
+        </p:nvSpPr>
+        <p:spPr>
+          <a:xfrm>
+            <a:off x="822960" y="5989320"/>
+            <a:ext cx="10515600" cy="365760"/>
+          </a:xfrm>
+          <a:prstGeom prst="rect">
+            <a:avLst/>
+          </a:prstGeom>
+          <a:noFill/>
+        </p:spPr>
+        <p:txBody>
+          <a:bodyPr wrap="none" lIns="0" rIns="0" tIns="0" bIns="0">
+            <a:spAutoFit/>
+          </a:bodyPr>
+          <a:lstStyle/>
+          <a:p>
+            <a:pPr>
+              <a:lnSpc>
+                <a:spcPct val="135000"/>
+              </a:lnSpc>
+            </a:pPr>
+            <a:r>
+              <a:rPr sz="1100" b="0" i="0">
+                <a:solidFill>
+                  <a:srgbClr val="6A675F"/>
+                </a:solidFill>
+                <a:latin typeface="IBM Plex Sans"/>
+              </a:rPr>
+              <a:t>Prativimb is Sanskrit for reflection. Patient data shown is synthetic; real data validation uses open access CGMacros.</a:t>
             </a:r>
           </a:p>
         </p:txBody>
@@ -3396,7 +3474,7 @@
             <a:r>
               <a:rPr sz="1000" b="0" i="0">
                 <a:solidFill>
-                  <a:srgbClr val="75726B"/>
+                  <a:srgbClr val="6A675F"/>
                 </a:solidFill>
                 <a:latin typeface="IBM Plex Sans"/>
               </a:rPr>
@@ -3509,7 +3587,7 @@
             <a:r>
               <a:rPr sz="900" b="0" i="0">
                 <a:solidFill>
-                  <a:srgbClr val="75726B"/>
+                  <a:srgbClr val="6A675F"/>
                 </a:solidFill>
                 <a:latin typeface="IBM Plex Sans"/>
               </a:rPr>
@@ -3653,11 +3731,11 @@
             <a:r>
               <a:rPr sz="1000" b="0" i="0">
                 <a:solidFill>
-                  <a:srgbClr val="75726B"/>
-                </a:solidFill>
-                <a:latin typeface="IBM Plex Sans"/>
-              </a:rPr>
-              <a:t>CASE STUDY</a:t>
+                  <a:srgbClr val="6A675F"/>
+                </a:solidFill>
+                <a:latin typeface="IBM Plex Sans"/>
+              </a:rPr>
+              <a:t>VALIDATION</a:t>
             </a:r>
           </a:p>
         </p:txBody>
@@ -3696,7 +3774,7 @@
                 </a:solidFill>
                 <a:latin typeface="IBM Plex Serif"/>
               </a:rPr>
-              <a:t>What if: Ramesh, 52, night shift, T2D</a:t>
+              <a:t>Real CGM traces: what transfers and what does not</a:t>
             </a:r>
           </a:p>
         </p:txBody>
@@ -3766,7 +3844,7 @@
             <a:r>
               <a:rPr sz="900" b="0" i="0">
                 <a:solidFill>
-                  <a:srgbClr val="75726B"/>
+                  <a:srgbClr val="6A675F"/>
                 </a:solidFill>
                 <a:latin typeface="IBM Plex Sans"/>
               </a:rPr>
@@ -3777,7 +3855,7 @@
       </p:sp>
       <p:pic>
         <p:nvPicPr>
-          <p:cNvPr id="6" name="Picture 5" descr="03_whatif_ramesh.png"/>
+          <p:cNvPr id="6" name="Picture 5" descr="real_data_cgmacros.png"/>
           <p:cNvPicPr>
             <a:picLocks noChangeAspect="1"/>
           </p:cNvPicPr>
@@ -3791,17 +3869,12 @@
         </p:blipFill>
         <p:spPr>
           <a:xfrm>
-            <a:off x="548640" y="1325880"/>
-            <a:ext cx="6943725" cy="4443984"/>
-          </a:xfrm>
-          <a:prstGeom prst="rect">
-            <a:avLst/>
-          </a:prstGeom>
-          <a:ln w="9525">
-            <a:solidFill>
-              <a:srgbClr val="D8D3C8"/>
-            </a:solidFill>
-          </a:ln>
+            <a:off x="548640" y="1371600"/>
+            <a:ext cx="10599570" cy="3931920"/>
+          </a:xfrm>
+          <a:prstGeom prst="rect">
+            <a:avLst/>
+          </a:prstGeom>
         </p:spPr>
       </p:pic>
       <p:sp>
@@ -3812,241 +3885,65 @@
         </p:nvSpPr>
         <p:spPr>
           <a:xfrm>
-            <a:off x="7863840" y="1463040"/>
-            <a:ext cx="3840480" cy="3211830"/>
-          </a:xfrm>
-          <a:prstGeom prst="rect">
-            <a:avLst/>
-          </a:prstGeom>
-          <a:noFill/>
-        </p:spPr>
-        <p:txBody>
-          <a:bodyPr wrap="none" lIns="0" rIns="0" tIns="0" bIns="0">
-            <a:spAutoFit/>
-          </a:bodyPr>
-          <a:lstStyle/>
-          <a:p>
-            <a:pPr>
-              <a:lnSpc>
-                <a:spcPct val="135000"/>
-              </a:lnSpc>
-            </a:pPr>
-            <a:r>
-              <a:rPr sz="1300" b="0" i="0">
-                <a:solidFill>
-                  <a:srgbClr val="1B1B19"/>
-                </a:solidFill>
-                <a:latin typeface="IBM Plex Sans"/>
-              </a:rPr>
-              <a:t>•  19:45. The hybrid forecast expects dinner at</a:t>
-            </a:r>
-          </a:p>
-          <a:p>
-            <a:pPr>
-              <a:lnSpc>
-                <a:spcPct val="135000"/>
-              </a:lnSpc>
-            </a:pPr>
-            <a:r>
-              <a:rPr sz="1300" b="0" i="0">
-                <a:solidFill>
-                  <a:srgbClr val="1B1B19"/>
-                </a:solidFill>
-                <a:latin typeface="IBM Plex Sans"/>
-              </a:rPr>
-              <a:t>   20:15 and a peak near 278 mg/dL, after three</a:t>
-            </a:r>
-          </a:p>
-          <a:p>
-            <a:pPr>
-              <a:lnSpc>
-                <a:spcPct val="135000"/>
-              </a:lnSpc>
-            </a:pPr>
-            <a:r>
-              <a:rPr sz="1300" b="0" i="0">
-                <a:solidFill>
-                  <a:srgbClr val="1B1B19"/>
-                </a:solidFill>
-                <a:latin typeface="IBM Plex Sans"/>
-              </a:rPr>
-              <a:t>   nights of 4.9 h sleep.</a:t>
-            </a:r>
-          </a:p>
-          <a:p>
-            <a:pPr>
-              <a:lnSpc>
-                <a:spcPct val="135000"/>
-              </a:lnSpc>
-            </a:pPr>
-            <a:r>
-              <a:rPr sz="1300" b="0" i="0">
-                <a:solidFill>
-                  <a:srgbClr val="1B1B19"/>
-                </a:solidFill>
-                <a:latin typeface="IBM Plex Sans"/>
-              </a:rPr>
-              <a:t/>
-            </a:r>
-          </a:p>
-          <a:p>
-            <a:pPr>
-              <a:lnSpc>
-                <a:spcPct val="135000"/>
-              </a:lnSpc>
-            </a:pPr>
-            <a:r>
-              <a:rPr sz="1300" b="0" i="0">
-                <a:solidFill>
-                  <a:srgbClr val="1B1B19"/>
-                </a:solidFill>
-                <a:latin typeface="IBM Plex Sans"/>
-              </a:rPr>
-              <a:t>•  A 15 minute walk after dinner takes 15 mg/dL</a:t>
-            </a:r>
-          </a:p>
-          <a:p>
-            <a:pPr>
-              <a:lnSpc>
-                <a:spcPct val="135000"/>
-              </a:lnSpc>
-            </a:pPr>
-            <a:r>
-              <a:rPr sz="1300" b="0" i="0">
-                <a:solidFill>
-                  <a:srgbClr val="1B1B19"/>
-                </a:solidFill>
-                <a:latin typeface="IBM Plex Sans"/>
-              </a:rPr>
-              <a:t>   off the twin's 6 hour peak. Millets instead of</a:t>
-            </a:r>
-          </a:p>
-          <a:p>
-            <a:pPr>
-              <a:lnSpc>
-                <a:spcPct val="135000"/>
-              </a:lnSpc>
-            </a:pPr>
-            <a:r>
-              <a:rPr sz="1300" b="0" i="0">
-                <a:solidFill>
-                  <a:srgbClr val="1B1B19"/>
-                </a:solidFill>
-                <a:latin typeface="IBM Plex Sans"/>
-              </a:rPr>
-              <a:t>   white rice take 48.</a:t>
-            </a:r>
-          </a:p>
-          <a:p>
-            <a:pPr>
-              <a:lnSpc>
-                <a:spcPct val="135000"/>
-              </a:lnSpc>
-            </a:pPr>
-            <a:r>
-              <a:rPr sz="1300" b="0" i="0">
-                <a:solidFill>
-                  <a:srgbClr val="1B1B19"/>
-                </a:solidFill>
-                <a:latin typeface="IBM Plex Sans"/>
-              </a:rPr>
-              <a:t/>
-            </a:r>
-          </a:p>
-          <a:p>
-            <a:pPr>
-              <a:lnSpc>
-                <a:spcPct val="135000"/>
-              </a:lnSpc>
-            </a:pPr>
-            <a:r>
-              <a:rPr sz="1300" b="0" i="0">
-                <a:solidFill>
-                  <a:srgbClr val="1B1B19"/>
-                </a:solidFill>
-                <a:latin typeface="IBM Plex Sans"/>
-              </a:rPr>
-              <a:t>•  Together: peak 57 mg/dL lower and 40 minutes</a:t>
-            </a:r>
-          </a:p>
-          <a:p>
-            <a:pPr>
-              <a:lnSpc>
-                <a:spcPct val="135000"/>
-              </a:lnSpc>
-            </a:pPr>
-            <a:r>
-              <a:rPr sz="1300" b="0" i="0">
-                <a:solidFill>
-                  <a:srgbClr val="1B1B19"/>
-                </a:solidFill>
-                <a:latin typeface="IBM Plex Sans"/>
-              </a:rPr>
-              <a:t>   less above 180.</a:t>
-            </a:r>
-          </a:p>
-          <a:p>
-            <a:pPr>
-              <a:lnSpc>
-                <a:spcPct val="135000"/>
-              </a:lnSpc>
-            </a:pPr>
-            <a:r>
-              <a:rPr sz="1300" b="0" i="0">
-                <a:solidFill>
-                  <a:srgbClr val="1B1B19"/>
-                </a:solidFill>
-                <a:latin typeface="IBM Plex Sans"/>
-              </a:rPr>
-              <a:t/>
-            </a:r>
-          </a:p>
-          <a:p>
-            <a:pPr>
-              <a:lnSpc>
-                <a:spcPct val="135000"/>
-              </a:lnSpc>
-            </a:pPr>
-            <a:r>
-              <a:rPr sz="1300" b="0" i="0">
-                <a:solidFill>
-                  <a:srgbClr val="1B1B19"/>
-                </a:solidFill>
-                <a:latin typeface="IBM Plex Sans"/>
-              </a:rPr>
-              <a:t>•  Moving dinner earlier barely changes the peak</a:t>
-            </a:r>
-          </a:p>
-          <a:p>
-            <a:pPr>
-              <a:lnSpc>
-                <a:spcPct val="135000"/>
-              </a:lnSpc>
-            </a:pPr>
-            <a:r>
-              <a:rPr sz="1300" b="0" i="0">
-                <a:solidFill>
-                  <a:srgbClr val="1B1B19"/>
-                </a:solidFill>
-                <a:latin typeface="IBM Plex Sans"/>
-              </a:rPr>
-              <a:t>   tonight (it can only move to 19:50). The twin</a:t>
-            </a:r>
-          </a:p>
-          <a:p>
-            <a:pPr>
-              <a:lnSpc>
-                <a:spcPct val="135000"/>
-              </a:lnSpc>
-            </a:pPr>
-            <a:r>
-              <a:rPr sz="1300" b="0" i="0">
-                <a:solidFill>
-                  <a:srgbClr val="1B1B19"/>
-                </a:solidFill>
-                <a:latin typeface="IBM Plex Sans"/>
-              </a:rPr>
-              <a:t>   can say no.</a:t>
+            <a:off x="822960" y="5440680"/>
+            <a:ext cx="10607040" cy="734377"/>
+          </a:xfrm>
+          <a:prstGeom prst="rect">
+            <a:avLst/>
+          </a:prstGeom>
+          <a:noFill/>
+        </p:spPr>
+        <p:txBody>
+          <a:bodyPr wrap="none" lIns="0" rIns="0" tIns="0" bIns="0">
+            <a:spAutoFit/>
+          </a:bodyPr>
+          <a:lstStyle/>
+          <a:p>
+            <a:pPr>
+              <a:lnSpc>
+                <a:spcPct val="135000"/>
+              </a:lnSpc>
+            </a:pPr>
+            <a:r>
+              <a:rPr sz="1250" b="0" i="0">
+                <a:solidFill>
+                  <a:srgbClr val="4A4843"/>
+                </a:solidFill>
+                <a:latin typeface="IBM Plex Sans"/>
+              </a:rPr>
+              <a:t>CGMacros (PhysioNet, open access): 45 adults, Dexcom G6, meals with known carbohydrate. Trained only on synthetic data, the hybrid lands near</a:t>
+            </a:r>
+          </a:p>
+          <a:p>
+            <a:pPr>
+              <a:lnSpc>
+                <a:spcPct val="135000"/>
+              </a:lnSpc>
+            </a:pPr>
+            <a:r>
+              <a:rPr sz="1250" b="0" i="0">
+                <a:solidFill>
+                  <a:srgbClr val="4A4843"/>
+                </a:solidFill>
+                <a:latin typeface="IBM Plex Sans"/>
+              </a:rPr>
+              <a:t>persistence (36.7 against 38.3 mg/dL at 2 h). Told about meals in advance, the calibrated twin reaches 29.6. Interval coverage recovers from</a:t>
+            </a:r>
+          </a:p>
+          <a:p>
+            <a:pPr>
+              <a:lnSpc>
+                <a:spcPct val="135000"/>
+              </a:lnSpc>
+            </a:pPr>
+            <a:r>
+              <a:rPr sz="1250" b="0" i="0">
+                <a:solidFill>
+                  <a:srgbClr val="4A4843"/>
+                </a:solidFill>
+                <a:latin typeface="IBM Plex Sans"/>
+              </a:rPr>
+              <a:t>78% to 88% after per site recalibration.</a:t>
             </a:r>
           </a:p>
         </p:txBody>
@@ -4107,11 +4004,11 @@
             <a:r>
               <a:rPr sz="1000" b="0" i="0">
                 <a:solidFill>
-                  <a:srgbClr val="75726B"/>
-                </a:solidFill>
-                <a:latin typeface="IBM Plex Sans"/>
-              </a:rPr>
-              <a:t>USE</a:t>
+                  <a:srgbClr val="6A675F"/>
+                </a:solidFill>
+                <a:latin typeface="IBM Plex Sans"/>
+              </a:rPr>
+              <a:t>CASE STUDY</a:t>
             </a:r>
           </a:p>
         </p:txBody>
@@ -4150,7 +4047,7 @@
                 </a:solidFill>
                 <a:latin typeface="IBM Plex Serif"/>
               </a:rPr>
-              <a:t>Clinical workflow</a:t>
+              <a:t>What if: Ramesh, 52, night shift, T2D</a:t>
             </a:r>
           </a:p>
         </p:txBody>
@@ -4220,7 +4117,7 @@
             <a:r>
               <a:rPr sz="900" b="0" i="0">
                 <a:solidFill>
-                  <a:srgbClr val="75726B"/>
+                  <a:srgbClr val="6A675F"/>
                 </a:solidFill>
                 <a:latin typeface="IBM Plex Sans"/>
               </a:rPr>
@@ -4231,7 +4128,7 @@
       </p:sp>
       <p:pic>
         <p:nvPicPr>
-          <p:cNvPr id="6" name="Picture 5" descr="01_ward.png"/>
+          <p:cNvPr id="6" name="Picture 5" descr="03_whatif_ramesh.png"/>
           <p:cNvPicPr>
             <a:picLocks noChangeAspect="1"/>
           </p:cNvPicPr>
@@ -4246,7 +4143,7 @@
         <p:spPr>
           <a:xfrm>
             <a:off x="548640" y="1325880"/>
-            <a:ext cx="5486400" cy="3511296"/>
+            <a:ext cx="6943725" cy="4443984"/>
           </a:xfrm>
           <a:prstGeom prst="rect">
             <a:avLst/>
@@ -4258,141 +4155,249 @@
           </a:ln>
         </p:spPr>
       </p:pic>
-      <p:pic>
-        <p:nvPicPr>
-          <p:cNvPr id="7" name="Picture 6" descr="06_note_ramesh.png"/>
-          <p:cNvPicPr>
-            <a:picLocks noChangeAspect="1"/>
-          </p:cNvPicPr>
-          <p:nvPr/>
-        </p:nvPicPr>
-        <p:blipFill>
-          <a:blip r:embed="rId3"/>
-          <a:stretch>
-            <a:fillRect/>
-          </a:stretch>
-        </p:blipFill>
-        <p:spPr>
-          <a:xfrm>
-            <a:off x="6263640" y="1325880"/>
-            <a:ext cx="5178751" cy="3694176"/>
-          </a:xfrm>
-          <a:prstGeom prst="rect">
-            <a:avLst/>
-          </a:prstGeom>
-          <a:ln w="9525">
-            <a:solidFill>
-              <a:srgbClr val="D8D3C8"/>
-            </a:solidFill>
-          </a:ln>
-        </p:spPr>
-      </p:pic>
-      <p:sp>
-        <p:nvSpPr>
-          <p:cNvPr id="8" name="TextBox 7"/>
-          <p:cNvSpPr txBox="1"/>
-          <p:nvPr/>
-        </p:nvSpPr>
-        <p:spPr>
-          <a:xfrm>
-            <a:off x="548640" y="5074920"/>
-            <a:ext cx="5486400" cy="502920"/>
-          </a:xfrm>
-          <a:prstGeom prst="rect">
-            <a:avLst/>
-          </a:prstGeom>
-          <a:noFill/>
-        </p:spPr>
-        <p:txBody>
-          <a:bodyPr wrap="none" lIns="0" rIns="0" tIns="0" bIns="0">
-            <a:spAutoFit/>
-          </a:bodyPr>
-          <a:lstStyle/>
-          <a:p>
-            <a:pPr>
-              <a:lnSpc>
-                <a:spcPct val="135000"/>
-              </a:lnSpc>
-            </a:pPr>
-            <a:r>
-              <a:rPr sz="1200" b="0" i="0">
-                <a:solidFill>
-                  <a:srgbClr val="4A4843"/>
-                </a:solidFill>
-                <a:latin typeface="IBM Plex Sans"/>
-              </a:rPr>
-              <a:t>1. Ward list sorted by alerts, cardiovascular flags and forecast peak. 2.</a:t>
-            </a:r>
-          </a:p>
-          <a:p>
-            <a:pPr>
-              <a:lnSpc>
-                <a:spcPct val="135000"/>
-              </a:lnSpc>
-            </a:pPr>
-            <a:r>
-              <a:rPr sz="1200" b="0" i="0">
-                <a:solidFill>
-                  <a:srgbClr val="4A4843"/>
-                </a:solidFill>
-                <a:latin typeface="IBM Plex Sans"/>
-              </a:rPr>
-              <a:t>Open the twin: forecast band, reasons, alert log, AGP.</a:t>
-            </a:r>
-          </a:p>
-        </p:txBody>
-      </p:sp>
-      <p:sp>
-        <p:nvSpPr>
-          <p:cNvPr id="9" name="TextBox 8"/>
-          <p:cNvSpPr txBox="1"/>
-          <p:nvPr/>
-        </p:nvSpPr>
-        <p:spPr>
-          <a:xfrm>
-            <a:off x="6263640" y="5212080"/>
-            <a:ext cx="5394960" cy="502920"/>
-          </a:xfrm>
-          <a:prstGeom prst="rect">
-            <a:avLst/>
-          </a:prstGeom>
-          <a:noFill/>
-        </p:spPr>
-        <p:txBody>
-          <a:bodyPr wrap="none" lIns="0" rIns="0" tIns="0" bIns="0">
-            <a:spAutoFit/>
-          </a:bodyPr>
-          <a:lstStyle/>
-          <a:p>
-            <a:pPr>
-              <a:lnSpc>
-                <a:spcPct val="135000"/>
-              </a:lnSpc>
-            </a:pPr>
-            <a:r>
-              <a:rPr sz="1200" b="0" i="0">
-                <a:solidFill>
-                  <a:srgbClr val="4A4843"/>
-                </a:solidFill>
-                <a:latin typeface="IBM Plex Sans"/>
-              </a:rPr>
-              <a:t>3. Try what if with the patient. 4. One click SOAP note, printable or PDF,</a:t>
-            </a:r>
-          </a:p>
-          <a:p>
-            <a:pPr>
-              <a:lnSpc>
-                <a:spcPct val="135000"/>
-              </a:lnSpc>
-            </a:pPr>
-            <a:r>
-              <a:rPr sz="1200" b="0" i="0">
-                <a:solidFill>
-                  <a:srgbClr val="4A4843"/>
-                </a:solidFill>
-                <a:latin typeface="IBM Plex Sans"/>
-              </a:rPr>
-              <a:t>for the record.</a:t>
+      <p:sp>
+        <p:nvSpPr>
+          <p:cNvPr id="7" name="TextBox 6"/>
+          <p:cNvSpPr txBox="1"/>
+          <p:nvPr/>
+        </p:nvSpPr>
+        <p:spPr>
+          <a:xfrm>
+            <a:off x="7863840" y="1463040"/>
+            <a:ext cx="3840480" cy="3211830"/>
+          </a:xfrm>
+          <a:prstGeom prst="rect">
+            <a:avLst/>
+          </a:prstGeom>
+          <a:noFill/>
+        </p:spPr>
+        <p:txBody>
+          <a:bodyPr wrap="none" lIns="0" rIns="0" tIns="0" bIns="0">
+            <a:spAutoFit/>
+          </a:bodyPr>
+          <a:lstStyle/>
+          <a:p>
+            <a:pPr>
+              <a:lnSpc>
+                <a:spcPct val="135000"/>
+              </a:lnSpc>
+            </a:pPr>
+            <a:r>
+              <a:rPr sz="1300" b="0" i="0">
+                <a:solidFill>
+                  <a:srgbClr val="1B1B19"/>
+                </a:solidFill>
+                <a:latin typeface="IBM Plex Sans"/>
+              </a:rPr>
+              <a:t>•  19:45. The hybrid forecast expects dinner at</a:t>
+            </a:r>
+          </a:p>
+          <a:p>
+            <a:pPr>
+              <a:lnSpc>
+                <a:spcPct val="135000"/>
+              </a:lnSpc>
+            </a:pPr>
+            <a:r>
+              <a:rPr sz="1300" b="0" i="0">
+                <a:solidFill>
+                  <a:srgbClr val="1B1B19"/>
+                </a:solidFill>
+                <a:latin typeface="IBM Plex Sans"/>
+              </a:rPr>
+              <a:t>   20:15 and a peak near 278 mg/dL, after three</a:t>
+            </a:r>
+          </a:p>
+          <a:p>
+            <a:pPr>
+              <a:lnSpc>
+                <a:spcPct val="135000"/>
+              </a:lnSpc>
+            </a:pPr>
+            <a:r>
+              <a:rPr sz="1300" b="0" i="0">
+                <a:solidFill>
+                  <a:srgbClr val="1B1B19"/>
+                </a:solidFill>
+                <a:latin typeface="IBM Plex Sans"/>
+              </a:rPr>
+              <a:t>   nights of 4.9 h sleep.</a:t>
+            </a:r>
+          </a:p>
+          <a:p>
+            <a:pPr>
+              <a:lnSpc>
+                <a:spcPct val="135000"/>
+              </a:lnSpc>
+            </a:pPr>
+            <a:r>
+              <a:rPr sz="1300" b="0" i="0">
+                <a:solidFill>
+                  <a:srgbClr val="1B1B19"/>
+                </a:solidFill>
+                <a:latin typeface="IBM Plex Sans"/>
+              </a:rPr>
+              <a:t/>
+            </a:r>
+          </a:p>
+          <a:p>
+            <a:pPr>
+              <a:lnSpc>
+                <a:spcPct val="135000"/>
+              </a:lnSpc>
+            </a:pPr>
+            <a:r>
+              <a:rPr sz="1300" b="0" i="0">
+                <a:solidFill>
+                  <a:srgbClr val="1B1B19"/>
+                </a:solidFill>
+                <a:latin typeface="IBM Plex Sans"/>
+              </a:rPr>
+              <a:t>•  A 15 minute walk after dinner takes 15 mg/dL</a:t>
+            </a:r>
+          </a:p>
+          <a:p>
+            <a:pPr>
+              <a:lnSpc>
+                <a:spcPct val="135000"/>
+              </a:lnSpc>
+            </a:pPr>
+            <a:r>
+              <a:rPr sz="1300" b="0" i="0">
+                <a:solidFill>
+                  <a:srgbClr val="1B1B19"/>
+                </a:solidFill>
+                <a:latin typeface="IBM Plex Sans"/>
+              </a:rPr>
+              <a:t>   off the twin's 6 hour peak. Millets instead of</a:t>
+            </a:r>
+          </a:p>
+          <a:p>
+            <a:pPr>
+              <a:lnSpc>
+                <a:spcPct val="135000"/>
+              </a:lnSpc>
+            </a:pPr>
+            <a:r>
+              <a:rPr sz="1300" b="0" i="0">
+                <a:solidFill>
+                  <a:srgbClr val="1B1B19"/>
+                </a:solidFill>
+                <a:latin typeface="IBM Plex Sans"/>
+              </a:rPr>
+              <a:t>   white rice take 48.</a:t>
+            </a:r>
+          </a:p>
+          <a:p>
+            <a:pPr>
+              <a:lnSpc>
+                <a:spcPct val="135000"/>
+              </a:lnSpc>
+            </a:pPr>
+            <a:r>
+              <a:rPr sz="1300" b="0" i="0">
+                <a:solidFill>
+                  <a:srgbClr val="1B1B19"/>
+                </a:solidFill>
+                <a:latin typeface="IBM Plex Sans"/>
+              </a:rPr>
+              <a:t/>
+            </a:r>
+          </a:p>
+          <a:p>
+            <a:pPr>
+              <a:lnSpc>
+                <a:spcPct val="135000"/>
+              </a:lnSpc>
+            </a:pPr>
+            <a:r>
+              <a:rPr sz="1300" b="0" i="0">
+                <a:solidFill>
+                  <a:srgbClr val="1B1B19"/>
+                </a:solidFill>
+                <a:latin typeface="IBM Plex Sans"/>
+              </a:rPr>
+              <a:t>•  Together: peak 57 mg/dL lower and 40 minutes</a:t>
+            </a:r>
+          </a:p>
+          <a:p>
+            <a:pPr>
+              <a:lnSpc>
+                <a:spcPct val="135000"/>
+              </a:lnSpc>
+            </a:pPr>
+            <a:r>
+              <a:rPr sz="1300" b="0" i="0">
+                <a:solidFill>
+                  <a:srgbClr val="1B1B19"/>
+                </a:solidFill>
+                <a:latin typeface="IBM Plex Sans"/>
+              </a:rPr>
+              <a:t>   less above 180.</a:t>
+            </a:r>
+          </a:p>
+          <a:p>
+            <a:pPr>
+              <a:lnSpc>
+                <a:spcPct val="135000"/>
+              </a:lnSpc>
+            </a:pPr>
+            <a:r>
+              <a:rPr sz="1300" b="0" i="0">
+                <a:solidFill>
+                  <a:srgbClr val="1B1B19"/>
+                </a:solidFill>
+                <a:latin typeface="IBM Plex Sans"/>
+              </a:rPr>
+              <a:t/>
+            </a:r>
+          </a:p>
+          <a:p>
+            <a:pPr>
+              <a:lnSpc>
+                <a:spcPct val="135000"/>
+              </a:lnSpc>
+            </a:pPr>
+            <a:r>
+              <a:rPr sz="1300" b="0" i="0">
+                <a:solidFill>
+                  <a:srgbClr val="1B1B19"/>
+                </a:solidFill>
+                <a:latin typeface="IBM Plex Sans"/>
+              </a:rPr>
+              <a:t>•  Moving dinner earlier barely changes the peak</a:t>
+            </a:r>
+          </a:p>
+          <a:p>
+            <a:pPr>
+              <a:lnSpc>
+                <a:spcPct val="135000"/>
+              </a:lnSpc>
+            </a:pPr>
+            <a:r>
+              <a:rPr sz="1300" b="0" i="0">
+                <a:solidFill>
+                  <a:srgbClr val="1B1B19"/>
+                </a:solidFill>
+                <a:latin typeface="IBM Plex Sans"/>
+              </a:rPr>
+              <a:t>   tonight (it can only move to 19:50). The twin</a:t>
+            </a:r>
+          </a:p>
+          <a:p>
+            <a:pPr>
+              <a:lnSpc>
+                <a:spcPct val="135000"/>
+              </a:lnSpc>
+            </a:pPr>
+            <a:r>
+              <a:rPr sz="1300" b="0" i="0">
+                <a:solidFill>
+                  <a:srgbClr val="1B1B19"/>
+                </a:solidFill>
+                <a:latin typeface="IBM Plex Sans"/>
+              </a:rPr>
+              <a:t>   can say no.</a:t>
             </a:r>
           </a:p>
         </p:txBody>
@@ -4453,11 +4458,11 @@
             <a:r>
               <a:rPr sz="1000" b="0" i="0">
                 <a:solidFill>
-                  <a:srgbClr val="75726B"/>
-                </a:solidFill>
-                <a:latin typeface="IBM Plex Sans"/>
-              </a:rPr>
-              <a:t>GOVERNANCE</a:t>
+                  <a:srgbClr val="6A675F"/>
+                </a:solidFill>
+                <a:latin typeface="IBM Plex Sans"/>
+              </a:rPr>
+              <a:t>USE</a:t>
             </a:r>
           </a:p>
         </p:txBody>
@@ -4496,7 +4501,7 @@
                 </a:solidFill>
                 <a:latin typeface="IBM Plex Serif"/>
               </a:rPr>
-              <a:t>Privacy, safety and limits</a:t>
+              <a:t>Clinical workflow</a:t>
             </a:r>
           </a:p>
         </p:txBody>
@@ -4566,7 +4571,7 @@
             <a:r>
               <a:rPr sz="900" b="0" i="0">
                 <a:solidFill>
-                  <a:srgbClr val="75726B"/>
+                  <a:srgbClr val="6A675F"/>
                 </a:solidFill>
                 <a:latin typeface="IBM Plex Sans"/>
               </a:rPr>
@@ -4575,240 +4580,64 @@
           </a:p>
         </p:txBody>
       </p:sp>
-      <p:sp>
-        <p:nvSpPr>
-          <p:cNvPr id="6" name="TextBox 5"/>
-          <p:cNvSpPr txBox="1"/>
-          <p:nvPr/>
-        </p:nvSpPr>
-        <p:spPr>
-          <a:xfrm>
-            <a:off x="822960" y="1600200"/>
-            <a:ext cx="5120640" cy="2637472"/>
-          </a:xfrm>
-          <a:prstGeom prst="rect">
-            <a:avLst/>
-          </a:prstGeom>
-          <a:noFill/>
-        </p:spPr>
-        <p:txBody>
-          <a:bodyPr wrap="none" lIns="0" rIns="0" tIns="0" bIns="0">
-            <a:spAutoFit/>
-          </a:bodyPr>
-          <a:lstStyle/>
-          <a:p>
-            <a:pPr>
-              <a:lnSpc>
-                <a:spcPct val="135000"/>
-              </a:lnSpc>
-            </a:pPr>
-            <a:r>
-              <a:rPr sz="1350" b="0" i="0">
-                <a:solidFill>
-                  <a:srgbClr val="1B1B19"/>
-                </a:solidFill>
-                <a:latin typeface="IBM Plex Sans"/>
-              </a:rPr>
-              <a:t>•  Synthetic data only: no personal data under the DPDP Act</a:t>
-            </a:r>
-          </a:p>
-          <a:p>
-            <a:pPr>
-              <a:lnSpc>
-                <a:spcPct val="135000"/>
-              </a:lnSpc>
-            </a:pPr>
-            <a:r>
-              <a:rPr sz="1350" b="0" i="0">
-                <a:solidFill>
-                  <a:srgbClr val="1B1B19"/>
-                </a:solidFill>
-                <a:latin typeface="IBM Plex Sans"/>
-              </a:rPr>
-              <a:t>   2023 or HIPAA was used.</a:t>
-            </a:r>
-          </a:p>
-          <a:p>
-            <a:pPr>
-              <a:lnSpc>
-                <a:spcPct val="135000"/>
-              </a:lnSpc>
-            </a:pPr>
-            <a:r>
-              <a:rPr sz="1350" b="0" i="0">
-                <a:solidFill>
-                  <a:srgbClr val="1B1B19"/>
-                </a:solidFill>
-                <a:latin typeface="IBM Plex Sans"/>
-              </a:rPr>
-              <a:t/>
-            </a:r>
-          </a:p>
-          <a:p>
-            <a:pPr>
-              <a:lnSpc>
-                <a:spcPct val="135000"/>
-              </a:lnSpc>
-            </a:pPr>
-            <a:r>
-              <a:rPr sz="1350" b="0" i="0">
-                <a:solidFill>
-                  <a:srgbClr val="1B1B19"/>
-                </a:solidFill>
-                <a:latin typeface="IBM Plex Sans"/>
-              </a:rPr>
-              <a:t>•  Each record carries a consent artefact: purpose limited,</a:t>
-            </a:r>
-          </a:p>
-          <a:p>
-            <a:pPr>
-              <a:lnSpc>
-                <a:spcPct val="135000"/>
-              </a:lnSpc>
-            </a:pPr>
-            <a:r>
-              <a:rPr sz="1350" b="0" i="0">
-                <a:solidFill>
-                  <a:srgbClr val="1B1B19"/>
-                </a:solidFill>
-                <a:latin typeface="IBM Plex Sans"/>
-              </a:rPr>
-              <a:t>   time bound, revocable.</a:t>
-            </a:r>
-          </a:p>
-          <a:p>
-            <a:pPr>
-              <a:lnSpc>
-                <a:spcPct val="135000"/>
-              </a:lnSpc>
-            </a:pPr>
-            <a:r>
-              <a:rPr sz="1350" b="0" i="0">
-                <a:solidFill>
-                  <a:srgbClr val="1B1B19"/>
-                </a:solidFill>
-                <a:latin typeface="IBM Plex Sans"/>
-              </a:rPr>
-              <a:t/>
-            </a:r>
-          </a:p>
-          <a:p>
-            <a:pPr>
-              <a:lnSpc>
-                <a:spcPct val="135000"/>
-              </a:lnSpc>
-            </a:pPr>
-            <a:r>
-              <a:rPr sz="1350" b="0" i="0">
-                <a:solidFill>
-                  <a:srgbClr val="1B1B19"/>
-                </a:solidFill>
-                <a:latin typeface="IBM Plex Sans"/>
-              </a:rPr>
-              <a:t>•  Deployment design: on premises inference, no identifiers in</a:t>
-            </a:r>
-          </a:p>
-          <a:p>
-            <a:pPr>
-              <a:lnSpc>
-                <a:spcPct val="135000"/>
-              </a:lnSpc>
-            </a:pPr>
-            <a:r>
-              <a:rPr sz="1350" b="0" i="0">
-                <a:solidFill>
-                  <a:srgbClr val="1B1B19"/>
-                </a:solidFill>
-                <a:latin typeface="IBM Plex Sans"/>
-              </a:rPr>
-              <a:t>   model features, audit log, ABDM consent flow.</a:t>
-            </a:r>
-          </a:p>
-          <a:p>
-            <a:pPr>
-              <a:lnSpc>
-                <a:spcPct val="135000"/>
-              </a:lnSpc>
-            </a:pPr>
-            <a:r>
-              <a:rPr sz="1350" b="0" i="0">
-                <a:solidFill>
-                  <a:srgbClr val="1B1B19"/>
-                </a:solidFill>
-                <a:latin typeface="IBM Plex Sans"/>
-              </a:rPr>
-              <a:t/>
-            </a:r>
-          </a:p>
-          <a:p>
-            <a:pPr>
-              <a:lnSpc>
-                <a:spcPct val="135000"/>
-              </a:lnSpc>
-            </a:pPr>
-            <a:r>
-              <a:rPr sz="1350" b="0" i="0">
-                <a:solidFill>
-                  <a:srgbClr val="1B1B19"/>
-                </a:solidFill>
-                <a:latin typeface="IBM Plex Sans"/>
-              </a:rPr>
-              <a:t>•  Decision support only, not a diagnosis. The clinician</a:t>
-            </a:r>
-          </a:p>
-          <a:p>
-            <a:pPr>
-              <a:lnSpc>
-                <a:spcPct val="135000"/>
-              </a:lnSpc>
-            </a:pPr>
-            <a:r>
-              <a:rPr sz="1350" b="0" i="0">
-                <a:solidFill>
-                  <a:srgbClr val="1B1B19"/>
-                </a:solidFill>
-                <a:latin typeface="IBM Plex Sans"/>
-              </a:rPr>
-              <a:t>   decides.</a:t>
-            </a:r>
-          </a:p>
-        </p:txBody>
-      </p:sp>
-      <p:cxnSp>
-        <p:nvCxnSpPr>
-          <p:cNvPr id="7" name="Connector 6"/>
-          <p:cNvCxnSpPr/>
-          <p:nvPr/>
-        </p:nvCxnSpPr>
-        <p:spPr>
-          <a:xfrm>
-            <a:off x="6400800" y="1645920"/>
-            <a:ext cx="5029200" cy="0"/>
-          </a:xfrm>
-          <a:prstGeom prst="line">
-            <a:avLst/>
-          </a:prstGeom>
-          <a:ln w="10160">
+      <p:pic>
+        <p:nvPicPr>
+          <p:cNvPr id="6" name="Picture 5" descr="01_ward.png"/>
+          <p:cNvPicPr>
+            <a:picLocks noChangeAspect="1"/>
+          </p:cNvPicPr>
+          <p:nvPr/>
+        </p:nvPicPr>
+        <p:blipFill>
+          <a:blip r:embed="rId2"/>
+          <a:stretch>
+            <a:fillRect/>
+          </a:stretch>
+        </p:blipFill>
+        <p:spPr>
+          <a:xfrm>
+            <a:off x="548640" y="1325880"/>
+            <a:ext cx="5486400" cy="3511296"/>
+          </a:xfrm>
+          <a:prstGeom prst="rect">
+            <a:avLst/>
+          </a:prstGeom>
+          <a:ln w="9525">
             <a:solidFill>
               <a:srgbClr val="D8D3C8"/>
             </a:solidFill>
           </a:ln>
         </p:spPr>
-        <p:style>
-          <a:lnRef idx="2">
-            <a:schemeClr val="accent1"/>
-          </a:lnRef>
-          <a:fillRef idx="0">
-            <a:schemeClr val="accent1"/>
-          </a:fillRef>
-          <a:effectRef idx="1">
-            <a:schemeClr val="accent1"/>
-          </a:effectRef>
-          <a:fontRef idx="minor">
-            <a:schemeClr val="tx1"/>
-          </a:fontRef>
-        </p:style>
-      </p:cxnSp>
+      </p:pic>
+      <p:pic>
+        <p:nvPicPr>
+          <p:cNvPr id="7" name="Picture 6" descr="06_note_ramesh.png"/>
+          <p:cNvPicPr>
+            <a:picLocks noChangeAspect="1"/>
+          </p:cNvPicPr>
+          <p:nvPr/>
+        </p:nvPicPr>
+        <p:blipFill>
+          <a:blip r:embed="rId3"/>
+          <a:stretch>
+            <a:fillRect/>
+          </a:stretch>
+        </p:blipFill>
+        <p:spPr>
+          <a:xfrm>
+            <a:off x="6263640" y="1325880"/>
+            <a:ext cx="5191690" cy="3694176"/>
+          </a:xfrm>
+          <a:prstGeom prst="rect">
+            <a:avLst/>
+          </a:prstGeom>
+          <a:ln w="9525">
+            <a:solidFill>
+              <a:srgbClr val="D8D3C8"/>
+            </a:solidFill>
+          </a:ln>
+        </p:spPr>
+      </p:pic>
       <p:sp>
         <p:nvSpPr>
           <p:cNvPr id="8" name="TextBox 7"/>
@@ -4817,33 +4646,65 @@
         </p:nvSpPr>
         <p:spPr>
           <a:xfrm>
-            <a:off x="6400800" y="1783080"/>
-            <a:ext cx="5029200" cy="365760"/>
-          </a:xfrm>
-          <a:prstGeom prst="rect">
-            <a:avLst/>
-          </a:prstGeom>
-          <a:noFill/>
-        </p:spPr>
-        <p:txBody>
-          <a:bodyPr wrap="none" lIns="0" rIns="0" tIns="0" bIns="0">
-            <a:spAutoFit/>
-          </a:bodyPr>
-          <a:lstStyle/>
-          <a:p>
-            <a:pPr>
-              <a:lnSpc>
-                <a:spcPct val="135000"/>
-              </a:lnSpc>
-            </a:pPr>
-            <a:r>
-              <a:rPr sz="1400" b="0" i="0">
-                <a:solidFill>
-                  <a:srgbClr val="1B1B19"/>
-                </a:solidFill>
-                <a:latin typeface="IBM Plex Serif"/>
-              </a:rPr>
-              <a:t>Limitations we state openly</a:t>
+            <a:off x="548640" y="5074920"/>
+            <a:ext cx="5486400" cy="708660"/>
+          </a:xfrm>
+          <a:prstGeom prst="rect">
+            <a:avLst/>
+          </a:prstGeom>
+          <a:noFill/>
+        </p:spPr>
+        <p:txBody>
+          <a:bodyPr wrap="none" lIns="0" rIns="0" tIns="0" bIns="0">
+            <a:spAutoFit/>
+          </a:bodyPr>
+          <a:lstStyle/>
+          <a:p>
+            <a:pPr>
+              <a:lnSpc>
+                <a:spcPct val="135000"/>
+              </a:lnSpc>
+            </a:pPr>
+            <a:r>
+              <a:rPr sz="1200" b="0" i="0">
+                <a:solidFill>
+                  <a:srgbClr val="4A4843"/>
+                </a:solidFill>
+                <a:latin typeface="IBM Plex Sans"/>
+              </a:rPr>
+              <a:t>1. Ward sorted by alerts, with what changed since the last look; acknowledge</a:t>
+            </a:r>
+          </a:p>
+          <a:p>
+            <a:pPr>
+              <a:lnSpc>
+                <a:spcPct val="135000"/>
+              </a:lnSpc>
+            </a:pPr>
+            <a:r>
+              <a:rPr sz="1200" b="0" i="0">
+                <a:solidFill>
+                  <a:srgbClr val="4A4843"/>
+                </a:solidFill>
+                <a:latin typeface="IBM Plex Sans"/>
+              </a:rPr>
+              <a:t>and snooze, with an audit trail. 2. Open the twin: forecast band, reasons,</a:t>
+            </a:r>
+          </a:p>
+          <a:p>
+            <a:pPr>
+              <a:lnSpc>
+                <a:spcPct val="135000"/>
+              </a:lnSpc>
+            </a:pPr>
+            <a:r>
+              <a:rPr sz="1200" b="0" i="0">
+                <a:solidFill>
+                  <a:srgbClr val="4A4843"/>
+                </a:solidFill>
+                <a:latin typeface="IBM Plex Sans"/>
+              </a:rPr>
+              <a:t>alert log, AGP; tell it about tonight's meal.</a:t>
             </a:r>
           </a:p>
         </p:txBody>
@@ -4856,161 +4717,49 @@
         </p:nvSpPr>
         <p:spPr>
           <a:xfrm>
-            <a:off x="6400800" y="2286000"/>
-            <a:ext cx="5029200" cy="2097405"/>
-          </a:xfrm>
-          <a:prstGeom prst="rect">
-            <a:avLst/>
-          </a:prstGeom>
-          <a:noFill/>
-        </p:spPr>
-        <p:txBody>
-          <a:bodyPr wrap="none" lIns="0" rIns="0" tIns="0" bIns="0">
-            <a:spAutoFit/>
-          </a:bodyPr>
-          <a:lstStyle/>
-          <a:p>
-            <a:pPr>
-              <a:lnSpc>
-                <a:spcPct val="135000"/>
-              </a:lnSpc>
-            </a:pPr>
-            <a:r>
-              <a:rPr sz="1300" b="0" i="0">
+            <a:off x="6263640" y="5212080"/>
+            <a:ext cx="5394960" cy="502920"/>
+          </a:xfrm>
+          <a:prstGeom prst="rect">
+            <a:avLst/>
+          </a:prstGeom>
+          <a:noFill/>
+        </p:spPr>
+        <p:txBody>
+          <a:bodyPr wrap="none" lIns="0" rIns="0" tIns="0" bIns="0">
+            <a:spAutoFit/>
+          </a:bodyPr>
+          <a:lstStyle/>
+          <a:p>
+            <a:pPr>
+              <a:lnSpc>
+                <a:spcPct val="135000"/>
+              </a:lnSpc>
+            </a:pPr>
+            <a:r>
+              <a:rPr sz="1200" b="0" i="0">
                 <a:solidFill>
                   <a:srgbClr val="4A4843"/>
                 </a:solidFill>
                 <a:latin typeface="IBM Plex Sans"/>
               </a:rPr>
-              <a:t>•  Synthetic ground truth is still a model; real data will be</a:t>
-            </a:r>
-          </a:p>
-          <a:p>
-            <a:pPr>
-              <a:lnSpc>
-                <a:spcPct val="135000"/>
-              </a:lnSpc>
-            </a:pPr>
-            <a:r>
-              <a:rPr sz="1300" b="0" i="0">
+              <a:t>3. Rank the levers for this patient and share them in English, Hindi or</a:t>
+            </a:r>
+          </a:p>
+          <a:p>
+            <a:pPr>
+              <a:lnSpc>
+                <a:spcPct val="135000"/>
+              </a:lnSpc>
+            </a:pPr>
+            <a:r>
+              <a:rPr sz="1200" b="0" i="0">
                 <a:solidFill>
                   <a:srgbClr val="4A4843"/>
                 </a:solidFill>
                 <a:latin typeface="IBM Plex Sans"/>
               </a:rPr>
-              <a:t>   harder.</a:t>
-            </a:r>
-          </a:p>
-          <a:p>
-            <a:pPr>
-              <a:lnSpc>
-                <a:spcPct val="135000"/>
-              </a:lnSpc>
-            </a:pPr>
-            <a:r>
-              <a:rPr sz="1300" b="0" i="0">
-                <a:solidFill>
-                  <a:srgbClr val="4A4843"/>
-                </a:solidFill>
-                <a:latin typeface="IBM Plex Sans"/>
-              </a:rPr>
-              <a:t/>
-            </a:r>
-          </a:p>
-          <a:p>
-            <a:pPr>
-              <a:lnSpc>
-                <a:spcPct val="135000"/>
-              </a:lnSpc>
-            </a:pPr>
-            <a:r>
-              <a:rPr sz="1300" b="0" i="0">
-                <a:solidFill>
-                  <a:srgbClr val="4A4843"/>
-                </a:solidFill>
-                <a:latin typeface="IBM Plex Sans"/>
-              </a:rPr>
-              <a:t>•  Only 6 cardiovascular events in test patients.</a:t>
-            </a:r>
-          </a:p>
-          <a:p>
-            <a:pPr>
-              <a:lnSpc>
-                <a:spcPct val="135000"/>
-              </a:lnSpc>
-            </a:pPr>
-            <a:r>
-              <a:rPr sz="1300" b="0" i="0">
-                <a:solidFill>
-                  <a:srgbClr val="4A4843"/>
-                </a:solidFill>
-                <a:latin typeface="IBM Plex Sans"/>
-              </a:rPr>
-              <a:t/>
-            </a:r>
-          </a:p>
-          <a:p>
-            <a:pPr>
-              <a:lnSpc>
-                <a:spcPct val="135000"/>
-              </a:lnSpc>
-            </a:pPr>
-            <a:r>
-              <a:rPr sz="1300" b="0" i="0">
-                <a:solidFill>
-                  <a:srgbClr val="4A4843"/>
-                </a:solidFill>
-                <a:latin typeface="IBM Plex Sans"/>
-              </a:rPr>
-              <a:t>•  Conformal coverage is approximate with serially correlated</a:t>
-            </a:r>
-          </a:p>
-          <a:p>
-            <a:pPr>
-              <a:lnSpc>
-                <a:spcPct val="135000"/>
-              </a:lnSpc>
-            </a:pPr>
-            <a:r>
-              <a:rPr sz="1300" b="0" i="0">
-                <a:solidFill>
-                  <a:srgbClr val="4A4843"/>
-                </a:solidFill>
-                <a:latin typeface="IBM Plex Sans"/>
-              </a:rPr>
-              <a:t>   readings, and lower below 70 mg/dL.</a:t>
-            </a:r>
-          </a:p>
-          <a:p>
-            <a:pPr>
-              <a:lnSpc>
-                <a:spcPct val="135000"/>
-              </a:lnSpc>
-            </a:pPr>
-            <a:r>
-              <a:rPr sz="1300" b="0" i="0">
-                <a:solidFill>
-                  <a:srgbClr val="4A4843"/>
-                </a:solidFill>
-                <a:latin typeface="IBM Plex Sans"/>
-              </a:rPr>
-              <a:t/>
-            </a:r>
-          </a:p>
-          <a:p>
-            <a:pPr>
-              <a:lnSpc>
-                <a:spcPct val="135000"/>
-              </a:lnSpc>
-            </a:pPr>
-            <a:r>
-              <a:rPr sz="1300" b="0" i="0">
-                <a:solidFill>
-                  <a:srgbClr val="4A4843"/>
-                </a:solidFill>
-                <a:latin typeface="IBM Plex Sans"/>
-              </a:rPr>
-              <a:t>•  Unlogged meals remain the main source of missed spikes.</a:t>
+              <a:t>Tamil. 4. One click SOAP note for the record.</a:t>
             </a:r>
           </a:p>
         </p:txBody>
@@ -5071,11 +4820,11 @@
             <a:r>
               <a:rPr sz="1000" b="0" i="0">
                 <a:solidFill>
-                  <a:srgbClr val="75726B"/>
-                </a:solidFill>
-                <a:latin typeface="IBM Plex Sans"/>
-              </a:rPr>
-              <a:t>NEXT</a:t>
+                  <a:srgbClr val="6A675F"/>
+                </a:solidFill>
+                <a:latin typeface="IBM Plex Sans"/>
+              </a:rPr>
+              <a:t>GOVERNANCE</a:t>
             </a:r>
           </a:p>
         </p:txBody>
@@ -5114,7 +4863,7 @@
                 </a:solidFill>
                 <a:latin typeface="IBM Plex Serif"/>
               </a:rPr>
-              <a:t>Impact and roadmap</a:t>
+              <a:t>Privacy, safety and limits</a:t>
             </a:r>
           </a:p>
         </p:txBody>
@@ -5184,7 +4933,7 @@
             <a:r>
               <a:rPr sz="900" b="0" i="0">
                 <a:solidFill>
-                  <a:srgbClr val="75726B"/>
+                  <a:srgbClr val="6A675F"/>
                 </a:solidFill>
                 <a:latin typeface="IBM Plex Sans"/>
               </a:rPr>
@@ -5201,93 +4950,214 @@
         </p:nvSpPr>
         <p:spPr>
           <a:xfrm>
-            <a:off x="822960" y="1719072"/>
-            <a:ext cx="2103120" cy="365760"/>
-          </a:xfrm>
-          <a:prstGeom prst="rect">
-            <a:avLst/>
-          </a:prstGeom>
-          <a:noFill/>
-        </p:spPr>
-        <p:txBody>
-          <a:bodyPr wrap="none" lIns="0" rIns="0" tIns="0" bIns="0">
-            <a:spAutoFit/>
-          </a:bodyPr>
-          <a:lstStyle/>
-          <a:p>
-            <a:pPr>
-              <a:lnSpc>
-                <a:spcPct val="130000"/>
-              </a:lnSpc>
-            </a:pPr>
-            <a:r>
-              <a:rPr sz="1150" b="0" i="0">
-                <a:solidFill>
-                  <a:srgbClr val="75726B"/>
-                </a:solidFill>
-                <a:latin typeface="IBM Plex Sans"/>
-              </a:rPr>
-              <a:t>Now</a:t>
-            </a:r>
-          </a:p>
-        </p:txBody>
-      </p:sp>
-      <p:sp>
-        <p:nvSpPr>
-          <p:cNvPr id="7" name="TextBox 6"/>
-          <p:cNvSpPr txBox="1"/>
-          <p:nvPr/>
-        </p:nvSpPr>
-        <p:spPr>
-          <a:xfrm>
-            <a:off x="3017520" y="1719072"/>
-            <a:ext cx="8321040" cy="365760"/>
-          </a:xfrm>
-          <a:prstGeom prst="rect">
-            <a:avLst/>
-          </a:prstGeom>
-          <a:noFill/>
-        </p:spPr>
-        <p:txBody>
-          <a:bodyPr wrap="none" lIns="0" rIns="0" tIns="0" bIns="0">
-            <a:spAutoFit/>
-          </a:bodyPr>
-          <a:lstStyle/>
-          <a:p>
-            <a:pPr>
-              <a:lnSpc>
-                <a:spcPct val="130000"/>
-              </a:lnSpc>
-            </a:pPr>
-            <a:r>
-              <a:rPr sz="1150" b="0" i="0">
-                <a:solidFill>
-                  <a:srgbClr val="75726B"/>
-                </a:solidFill>
-                <a:latin typeface="IBM Plex Sans"/>
-              </a:rPr>
-              <a:t>Working prototype: data, twin, models, API, dashboard, tests, docs. Reproducible from one seed.</a:t>
+            <a:off x="822960" y="1600200"/>
+            <a:ext cx="5120640" cy="2637472"/>
+          </a:xfrm>
+          <a:prstGeom prst="rect">
+            <a:avLst/>
+          </a:prstGeom>
+          <a:noFill/>
+        </p:spPr>
+        <p:txBody>
+          <a:bodyPr wrap="none" lIns="0" rIns="0" tIns="0" bIns="0">
+            <a:spAutoFit/>
+          </a:bodyPr>
+          <a:lstStyle/>
+          <a:p>
+            <a:pPr>
+              <a:lnSpc>
+                <a:spcPct val="135000"/>
+              </a:lnSpc>
+            </a:pPr>
+            <a:r>
+              <a:rPr sz="1350" b="0" i="0">
+                <a:solidFill>
+                  <a:srgbClr val="1B1B19"/>
+                </a:solidFill>
+                <a:latin typeface="IBM Plex Sans"/>
+              </a:rPr>
+              <a:t>•  Synthetic data only: no personal data under the DPDP Act</a:t>
+            </a:r>
+          </a:p>
+          <a:p>
+            <a:pPr>
+              <a:lnSpc>
+                <a:spcPct val="135000"/>
+              </a:lnSpc>
+            </a:pPr>
+            <a:r>
+              <a:rPr sz="1350" b="0" i="0">
+                <a:solidFill>
+                  <a:srgbClr val="1B1B19"/>
+                </a:solidFill>
+                <a:latin typeface="IBM Plex Sans"/>
+              </a:rPr>
+              <a:t>   2023 or HIPAA was used.</a:t>
+            </a:r>
+          </a:p>
+          <a:p>
+            <a:pPr>
+              <a:lnSpc>
+                <a:spcPct val="135000"/>
+              </a:lnSpc>
+            </a:pPr>
+            <a:r>
+              <a:rPr sz="1350" b="0" i="0">
+                <a:solidFill>
+                  <a:srgbClr val="1B1B19"/>
+                </a:solidFill>
+                <a:latin typeface="IBM Plex Sans"/>
+              </a:rPr>
+              <a:t/>
+            </a:r>
+          </a:p>
+          <a:p>
+            <a:pPr>
+              <a:lnSpc>
+                <a:spcPct val="135000"/>
+              </a:lnSpc>
+            </a:pPr>
+            <a:r>
+              <a:rPr sz="1350" b="0" i="0">
+                <a:solidFill>
+                  <a:srgbClr val="1B1B19"/>
+                </a:solidFill>
+                <a:latin typeface="IBM Plex Sans"/>
+              </a:rPr>
+              <a:t>•  Each record carries a consent artefact: purpose limited,</a:t>
+            </a:r>
+          </a:p>
+          <a:p>
+            <a:pPr>
+              <a:lnSpc>
+                <a:spcPct val="135000"/>
+              </a:lnSpc>
+            </a:pPr>
+            <a:r>
+              <a:rPr sz="1350" b="0" i="0">
+                <a:solidFill>
+                  <a:srgbClr val="1B1B19"/>
+                </a:solidFill>
+                <a:latin typeface="IBM Plex Sans"/>
+              </a:rPr>
+              <a:t>   time bound, revocable.</a:t>
+            </a:r>
+          </a:p>
+          <a:p>
+            <a:pPr>
+              <a:lnSpc>
+                <a:spcPct val="135000"/>
+              </a:lnSpc>
+            </a:pPr>
+            <a:r>
+              <a:rPr sz="1350" b="0" i="0">
+                <a:solidFill>
+                  <a:srgbClr val="1B1B19"/>
+                </a:solidFill>
+                <a:latin typeface="IBM Plex Sans"/>
+              </a:rPr>
+              <a:t/>
+            </a:r>
+          </a:p>
+          <a:p>
+            <a:pPr>
+              <a:lnSpc>
+                <a:spcPct val="135000"/>
+              </a:lnSpc>
+            </a:pPr>
+            <a:r>
+              <a:rPr sz="1350" b="0" i="0">
+                <a:solidFill>
+                  <a:srgbClr val="1B1B19"/>
+                </a:solidFill>
+                <a:latin typeface="IBM Plex Sans"/>
+              </a:rPr>
+              <a:t>•  Deployment design: on premises inference, no identifiers in</a:t>
+            </a:r>
+          </a:p>
+          <a:p>
+            <a:pPr>
+              <a:lnSpc>
+                <a:spcPct val="135000"/>
+              </a:lnSpc>
+            </a:pPr>
+            <a:r>
+              <a:rPr sz="1350" b="0" i="0">
+                <a:solidFill>
+                  <a:srgbClr val="1B1B19"/>
+                </a:solidFill>
+                <a:latin typeface="IBM Plex Sans"/>
+              </a:rPr>
+              <a:t>   model features, audit log, ABDM consent flow.</a:t>
+            </a:r>
+          </a:p>
+          <a:p>
+            <a:pPr>
+              <a:lnSpc>
+                <a:spcPct val="135000"/>
+              </a:lnSpc>
+            </a:pPr>
+            <a:r>
+              <a:rPr sz="1350" b="0" i="0">
+                <a:solidFill>
+                  <a:srgbClr val="1B1B19"/>
+                </a:solidFill>
+                <a:latin typeface="IBM Plex Sans"/>
+              </a:rPr>
+              <a:t/>
+            </a:r>
+          </a:p>
+          <a:p>
+            <a:pPr>
+              <a:lnSpc>
+                <a:spcPct val="135000"/>
+              </a:lnSpc>
+            </a:pPr>
+            <a:r>
+              <a:rPr sz="1350" b="0" i="0">
+                <a:solidFill>
+                  <a:srgbClr val="1B1B19"/>
+                </a:solidFill>
+                <a:latin typeface="IBM Plex Sans"/>
+              </a:rPr>
+              <a:t>•  Decision support only, not a diagnosis. The clinician</a:t>
+            </a:r>
+          </a:p>
+          <a:p>
+            <a:pPr>
+              <a:lnSpc>
+                <a:spcPct val="135000"/>
+              </a:lnSpc>
+            </a:pPr>
+            <a:r>
+              <a:rPr sz="1350" b="0" i="0">
+                <a:solidFill>
+                  <a:srgbClr val="1B1B19"/>
+                </a:solidFill>
+                <a:latin typeface="IBM Plex Sans"/>
+              </a:rPr>
+              <a:t>   decides.</a:t>
             </a:r>
           </a:p>
         </p:txBody>
       </p:sp>
       <p:cxnSp>
         <p:nvCxnSpPr>
-          <p:cNvPr id="8" name="Connector 7"/>
+          <p:cNvPr id="7" name="Connector 6"/>
           <p:cNvCxnSpPr/>
           <p:nvPr/>
         </p:nvCxnSpPr>
         <p:spPr>
           <a:xfrm>
-            <a:off x="822960" y="2304288"/>
-            <a:ext cx="10607040" cy="0"/>
+            <a:off x="6400800" y="1645920"/>
+            <a:ext cx="5029200" cy="0"/>
           </a:xfrm>
           <a:prstGeom prst="line">
             <a:avLst/>
           </a:prstGeom>
           <a:ln w="10160">
             <a:solidFill>
-              <a:srgbClr val="75726B"/>
+              <a:srgbClr val="D8D3C8"/>
             </a:solidFill>
           </a:ln>
         </p:spPr>
@@ -5308,539 +5178,206 @@
       </p:cxnSp>
       <p:sp>
         <p:nvSpPr>
+          <p:cNvPr id="8" name="TextBox 7"/>
+          <p:cNvSpPr txBox="1"/>
+          <p:nvPr/>
+        </p:nvSpPr>
+        <p:spPr>
+          <a:xfrm>
+            <a:off x="6400800" y="1783080"/>
+            <a:ext cx="5029200" cy="365760"/>
+          </a:xfrm>
+          <a:prstGeom prst="rect">
+            <a:avLst/>
+          </a:prstGeom>
+          <a:noFill/>
+        </p:spPr>
+        <p:txBody>
+          <a:bodyPr wrap="none" lIns="0" rIns="0" tIns="0" bIns="0">
+            <a:spAutoFit/>
+          </a:bodyPr>
+          <a:lstStyle/>
+          <a:p>
+            <a:pPr>
+              <a:lnSpc>
+                <a:spcPct val="135000"/>
+              </a:lnSpc>
+            </a:pPr>
+            <a:r>
+              <a:rPr sz="1400" b="0" i="0">
+                <a:solidFill>
+                  <a:srgbClr val="1B1B19"/>
+                </a:solidFill>
+                <a:latin typeface="IBM Plex Serif"/>
+              </a:rPr>
+              <a:t>Limitations we state openly</a:t>
+            </a:r>
+          </a:p>
+        </p:txBody>
+      </p:sp>
+      <p:sp>
+        <p:nvSpPr>
           <p:cNvPr id="9" name="TextBox 8"/>
           <p:cNvSpPr txBox="1"/>
           <p:nvPr/>
         </p:nvSpPr>
         <p:spPr>
           <a:xfrm>
-            <a:off x="822960" y="2377440"/>
-            <a:ext cx="2103120" cy="365760"/>
-          </a:xfrm>
-          <a:prstGeom prst="rect">
-            <a:avLst/>
-          </a:prstGeom>
-          <a:noFill/>
-        </p:spPr>
-        <p:txBody>
-          <a:bodyPr wrap="none" lIns="0" rIns="0" tIns="0" bIns="0">
-            <a:spAutoFit/>
-          </a:bodyPr>
-          <a:lstStyle/>
-          <a:p>
-            <a:pPr>
-              <a:lnSpc>
-                <a:spcPct val="130000"/>
+            <a:off x="6400800" y="2286000"/>
+            <a:ext cx="5029200" cy="2097405"/>
+          </a:xfrm>
+          <a:prstGeom prst="rect">
+            <a:avLst/>
+          </a:prstGeom>
+          <a:noFill/>
+        </p:spPr>
+        <p:txBody>
+          <a:bodyPr wrap="none" lIns="0" rIns="0" tIns="0" bIns="0">
+            <a:spAutoFit/>
+          </a:bodyPr>
+          <a:lstStyle/>
+          <a:p>
+            <a:pPr>
+              <a:lnSpc>
+                <a:spcPct val="135000"/>
               </a:lnSpc>
             </a:pPr>
             <a:r>
               <a:rPr sz="1300" b="0" i="0">
                 <a:solidFill>
-                  <a:srgbClr val="1B1B19"/>
-                </a:solidFill>
-                <a:latin typeface="IBM Plex Sans"/>
-              </a:rPr>
-              <a:t>3 months</a:t>
-            </a:r>
-          </a:p>
-        </p:txBody>
-      </p:sp>
-      <p:sp>
-        <p:nvSpPr>
-          <p:cNvPr id="10" name="TextBox 9"/>
-          <p:cNvSpPr txBox="1"/>
-          <p:nvPr/>
-        </p:nvSpPr>
-        <p:spPr>
-          <a:xfrm>
-            <a:off x="3017520" y="2377440"/>
-            <a:ext cx="8321040" cy="520700"/>
-          </a:xfrm>
-          <a:prstGeom prst="rect">
-            <a:avLst/>
-          </a:prstGeom>
-          <a:noFill/>
-        </p:spPr>
-        <p:txBody>
-          <a:bodyPr wrap="none" lIns="0" rIns="0" tIns="0" bIns="0">
-            <a:spAutoFit/>
-          </a:bodyPr>
-          <a:lstStyle/>
-          <a:p>
-            <a:pPr>
-              <a:lnSpc>
-                <a:spcPct val="130000"/>
+                  <a:srgbClr val="4A4843"/>
+                </a:solidFill>
+                <a:latin typeface="IBM Plex Sans"/>
+              </a:rPr>
+              <a:t>•  Synthetic ground truth is still a model; real data will be</a:t>
+            </a:r>
+          </a:p>
+          <a:p>
+            <a:pPr>
+              <a:lnSpc>
+                <a:spcPct val="135000"/>
               </a:lnSpc>
             </a:pPr>
             <a:r>
               <a:rPr sz="1300" b="0" i="0">
                 <a:solidFill>
-                  <a:srgbClr val="1B1B19"/>
-                </a:solidFill>
-                <a:latin typeface="IBM Plex Sans"/>
-              </a:rPr>
-              <a:t>Retrospective validation on de-identified CGM and EHR data under an ethics approval; Indian food</a:t>
-            </a:r>
-          </a:p>
-          <a:p>
-            <a:pPr>
-              <a:lnSpc>
-                <a:spcPct val="130000"/>
+                  <a:srgbClr val="4A4843"/>
+                </a:solidFill>
+                <a:latin typeface="IBM Plex Sans"/>
+              </a:rPr>
+              <a:t>   harder.</a:t>
+            </a:r>
+          </a:p>
+          <a:p>
+            <a:pPr>
+              <a:lnSpc>
+                <a:spcPct val="135000"/>
               </a:lnSpc>
             </a:pPr>
             <a:r>
               <a:rPr sz="1300" b="0" i="0">
                 <a:solidFill>
-                  <a:srgbClr val="1B1B19"/>
-                </a:solidFill>
-                <a:latin typeface="IBM Plex Sans"/>
-              </a:rPr>
-              <a:t>absorption library.</a:t>
-            </a:r>
-          </a:p>
-        </p:txBody>
-      </p:sp>
-      <p:cxnSp>
-        <p:nvCxnSpPr>
-          <p:cNvPr id="11" name="Connector 10"/>
-          <p:cNvCxnSpPr/>
-          <p:nvPr/>
-        </p:nvCxnSpPr>
-        <p:spPr>
-          <a:xfrm>
-            <a:off x="822960" y="2962656"/>
-            <a:ext cx="10607040" cy="0"/>
-          </a:xfrm>
-          <a:prstGeom prst="line">
-            <a:avLst/>
-          </a:prstGeom>
-          <a:ln w="7620">
-            <a:solidFill>
-              <a:srgbClr val="D8D3C8"/>
-            </a:solidFill>
-          </a:ln>
-        </p:spPr>
-        <p:style>
-          <a:lnRef idx="2">
-            <a:schemeClr val="accent1"/>
-          </a:lnRef>
-          <a:fillRef idx="0">
-            <a:schemeClr val="accent1"/>
-          </a:fillRef>
-          <a:effectRef idx="1">
-            <a:schemeClr val="accent1"/>
-          </a:effectRef>
-          <a:fontRef idx="minor">
-            <a:schemeClr val="tx1"/>
-          </a:fontRef>
-        </p:style>
-      </p:cxnSp>
-      <p:sp>
-        <p:nvSpPr>
-          <p:cNvPr id="12" name="TextBox 11"/>
-          <p:cNvSpPr txBox="1"/>
-          <p:nvPr/>
-        </p:nvSpPr>
-        <p:spPr>
-          <a:xfrm>
-            <a:off x="822960" y="3035808"/>
-            <a:ext cx="2103120" cy="365760"/>
-          </a:xfrm>
-          <a:prstGeom prst="rect">
-            <a:avLst/>
-          </a:prstGeom>
-          <a:noFill/>
-        </p:spPr>
-        <p:txBody>
-          <a:bodyPr wrap="none" lIns="0" rIns="0" tIns="0" bIns="0">
-            <a:spAutoFit/>
-          </a:bodyPr>
-          <a:lstStyle/>
-          <a:p>
-            <a:pPr>
-              <a:lnSpc>
-                <a:spcPct val="130000"/>
+                  <a:srgbClr val="4A4843"/>
+                </a:solidFill>
+                <a:latin typeface="IBM Plex Sans"/>
+              </a:rPr>
+              <a:t/>
+            </a:r>
+          </a:p>
+          <a:p>
+            <a:pPr>
+              <a:lnSpc>
+                <a:spcPct val="135000"/>
               </a:lnSpc>
             </a:pPr>
             <a:r>
               <a:rPr sz="1300" b="0" i="0">
                 <a:solidFill>
-                  <a:srgbClr val="1B1B19"/>
-                </a:solidFill>
-                <a:latin typeface="IBM Plex Sans"/>
-              </a:rPr>
-              <a:t>6 months</a:t>
-            </a:r>
-          </a:p>
-        </p:txBody>
-      </p:sp>
-      <p:sp>
-        <p:nvSpPr>
-          <p:cNvPr id="13" name="TextBox 12"/>
-          <p:cNvSpPr txBox="1"/>
-          <p:nvPr/>
-        </p:nvSpPr>
-        <p:spPr>
-          <a:xfrm>
-            <a:off x="3017520" y="3035808"/>
-            <a:ext cx="8321040" cy="520700"/>
-          </a:xfrm>
-          <a:prstGeom prst="rect">
-            <a:avLst/>
-          </a:prstGeom>
-          <a:noFill/>
-        </p:spPr>
-        <p:txBody>
-          <a:bodyPr wrap="none" lIns="0" rIns="0" tIns="0" bIns="0">
-            <a:spAutoFit/>
-          </a:bodyPr>
-          <a:lstStyle/>
-          <a:p>
-            <a:pPr>
-              <a:lnSpc>
-                <a:spcPct val="130000"/>
+                  <a:srgbClr val="4A4843"/>
+                </a:solidFill>
+                <a:latin typeface="IBM Plex Sans"/>
+              </a:rPr>
+              <a:t>•  Only 6 cardiovascular events in test patients.</a:t>
+            </a:r>
+          </a:p>
+          <a:p>
+            <a:pPr>
+              <a:lnSpc>
+                <a:spcPct val="135000"/>
               </a:lnSpc>
             </a:pPr>
             <a:r>
               <a:rPr sz="1300" b="0" i="0">
                 <a:solidFill>
-                  <a:srgbClr val="1B1B19"/>
-                </a:solidFill>
-                <a:latin typeface="IBM Plex Sans"/>
-              </a:rPr>
-              <a:t>Federated learning of the residual model across hospitals; the twin stays per patient, only model updates</a:t>
-            </a:r>
-          </a:p>
-          <a:p>
-            <a:pPr>
-              <a:lnSpc>
-                <a:spcPct val="130000"/>
+                  <a:srgbClr val="4A4843"/>
+                </a:solidFill>
+                <a:latin typeface="IBM Plex Sans"/>
+              </a:rPr>
+              <a:t/>
+            </a:r>
+          </a:p>
+          <a:p>
+            <a:pPr>
+              <a:lnSpc>
+                <a:spcPct val="135000"/>
               </a:lnSpc>
             </a:pPr>
             <a:r>
               <a:rPr sz="1300" b="0" i="0">
                 <a:solidFill>
-                  <a:srgbClr val="1B1B19"/>
-                </a:solidFill>
-                <a:latin typeface="IBM Plex Sans"/>
-              </a:rPr>
-              <a:t>move.</a:t>
-            </a:r>
-          </a:p>
-        </p:txBody>
-      </p:sp>
-      <p:cxnSp>
-        <p:nvCxnSpPr>
-          <p:cNvPr id="14" name="Connector 13"/>
-          <p:cNvCxnSpPr/>
-          <p:nvPr/>
-        </p:nvCxnSpPr>
-        <p:spPr>
-          <a:xfrm>
-            <a:off x="822960" y="3621024"/>
-            <a:ext cx="10607040" cy="0"/>
-          </a:xfrm>
-          <a:prstGeom prst="line">
-            <a:avLst/>
-          </a:prstGeom>
-          <a:ln w="7620">
-            <a:solidFill>
-              <a:srgbClr val="D8D3C8"/>
-            </a:solidFill>
-          </a:ln>
-        </p:spPr>
-        <p:style>
-          <a:lnRef idx="2">
-            <a:schemeClr val="accent1"/>
-          </a:lnRef>
-          <a:fillRef idx="0">
-            <a:schemeClr val="accent1"/>
-          </a:fillRef>
-          <a:effectRef idx="1">
-            <a:schemeClr val="accent1"/>
-          </a:effectRef>
-          <a:fontRef idx="minor">
-            <a:schemeClr val="tx1"/>
-          </a:fontRef>
-        </p:style>
-      </p:cxnSp>
-      <p:sp>
-        <p:nvSpPr>
-          <p:cNvPr id="15" name="TextBox 14"/>
-          <p:cNvSpPr txBox="1"/>
-          <p:nvPr/>
-        </p:nvSpPr>
-        <p:spPr>
-          <a:xfrm>
-            <a:off x="822960" y="3694176"/>
-            <a:ext cx="2103120" cy="365760"/>
-          </a:xfrm>
-          <a:prstGeom prst="rect">
-            <a:avLst/>
-          </a:prstGeom>
-          <a:noFill/>
-        </p:spPr>
-        <p:txBody>
-          <a:bodyPr wrap="none" lIns="0" rIns="0" tIns="0" bIns="0">
-            <a:spAutoFit/>
-          </a:bodyPr>
-          <a:lstStyle/>
-          <a:p>
-            <a:pPr>
-              <a:lnSpc>
-                <a:spcPct val="130000"/>
+                  <a:srgbClr val="4A4843"/>
+                </a:solidFill>
+                <a:latin typeface="IBM Plex Sans"/>
+              </a:rPr>
+              <a:t>•  Conformal coverage is approximate with serially correlated</a:t>
+            </a:r>
+          </a:p>
+          <a:p>
+            <a:pPr>
+              <a:lnSpc>
+                <a:spcPct val="135000"/>
               </a:lnSpc>
             </a:pPr>
             <a:r>
               <a:rPr sz="1300" b="0" i="0">
                 <a:solidFill>
-                  <a:srgbClr val="1B1B19"/>
-                </a:solidFill>
-                <a:latin typeface="IBM Plex Sans"/>
-              </a:rPr>
-              <a:t>9 months</a:t>
-            </a:r>
-          </a:p>
-        </p:txBody>
-      </p:sp>
-      <p:sp>
-        <p:nvSpPr>
-          <p:cNvPr id="16" name="TextBox 15"/>
-          <p:cNvSpPr txBox="1"/>
-          <p:nvPr/>
-        </p:nvSpPr>
-        <p:spPr>
-          <a:xfrm>
-            <a:off x="3017520" y="3694176"/>
-            <a:ext cx="8321040" cy="365760"/>
-          </a:xfrm>
-          <a:prstGeom prst="rect">
-            <a:avLst/>
-          </a:prstGeom>
-          <a:noFill/>
-        </p:spPr>
-        <p:txBody>
-          <a:bodyPr wrap="none" lIns="0" rIns="0" tIns="0" bIns="0">
-            <a:spAutoFit/>
-          </a:bodyPr>
-          <a:lstStyle/>
-          <a:p>
-            <a:pPr>
-              <a:lnSpc>
-                <a:spcPct val="130000"/>
+                  <a:srgbClr val="4A4843"/>
+                </a:solidFill>
+                <a:latin typeface="IBM Plex Sans"/>
+              </a:rPr>
+              <a:t>   readings, and lower below 70 mg/dL.</a:t>
+            </a:r>
+          </a:p>
+          <a:p>
+            <a:pPr>
+              <a:lnSpc>
+                <a:spcPct val="135000"/>
               </a:lnSpc>
             </a:pPr>
             <a:r>
               <a:rPr sz="1300" b="0" i="0">
                 <a:solidFill>
-                  <a:srgbClr val="1B1B19"/>
-                </a:solidFill>
-                <a:latin typeface="IBM Plex Sans"/>
-              </a:rPr>
-              <a:t>ABDM integration (health ID, consent manager, FHIR); real device APIs (Libre, Dexcom, Health Connect).</a:t>
-            </a:r>
-          </a:p>
-        </p:txBody>
-      </p:sp>
-      <p:cxnSp>
-        <p:nvCxnSpPr>
-          <p:cNvPr id="17" name="Connector 16"/>
-          <p:cNvCxnSpPr/>
-          <p:nvPr/>
-        </p:nvCxnSpPr>
-        <p:spPr>
-          <a:xfrm>
-            <a:off x="822960" y="4279392"/>
-            <a:ext cx="10607040" cy="0"/>
-          </a:xfrm>
-          <a:prstGeom prst="line">
-            <a:avLst/>
-          </a:prstGeom>
-          <a:ln w="7620">
-            <a:solidFill>
-              <a:srgbClr val="D8D3C8"/>
-            </a:solidFill>
-          </a:ln>
-        </p:spPr>
-        <p:style>
-          <a:lnRef idx="2">
-            <a:schemeClr val="accent1"/>
-          </a:lnRef>
-          <a:fillRef idx="0">
-            <a:schemeClr val="accent1"/>
-          </a:fillRef>
-          <a:effectRef idx="1">
-            <a:schemeClr val="accent1"/>
-          </a:effectRef>
-          <a:fontRef idx="minor">
-            <a:schemeClr val="tx1"/>
-          </a:fontRef>
-        </p:style>
-      </p:cxnSp>
-      <p:sp>
-        <p:nvSpPr>
-          <p:cNvPr id="18" name="TextBox 17"/>
-          <p:cNvSpPr txBox="1"/>
-          <p:nvPr/>
-        </p:nvSpPr>
-        <p:spPr>
-          <a:xfrm>
-            <a:off x="822960" y="4352544"/>
-            <a:ext cx="2103120" cy="365760"/>
-          </a:xfrm>
-          <a:prstGeom prst="rect">
-            <a:avLst/>
-          </a:prstGeom>
-          <a:noFill/>
-        </p:spPr>
-        <p:txBody>
-          <a:bodyPr wrap="none" lIns="0" rIns="0" tIns="0" bIns="0">
-            <a:spAutoFit/>
-          </a:bodyPr>
-          <a:lstStyle/>
-          <a:p>
-            <a:pPr>
-              <a:lnSpc>
-                <a:spcPct val="130000"/>
+                  <a:srgbClr val="4A4843"/>
+                </a:solidFill>
+                <a:latin typeface="IBM Plex Sans"/>
+              </a:rPr>
+              <a:t/>
+            </a:r>
+          </a:p>
+          <a:p>
+            <a:pPr>
+              <a:lnSpc>
+                <a:spcPct val="135000"/>
               </a:lnSpc>
             </a:pPr>
             <a:r>
               <a:rPr sz="1300" b="0" i="0">
                 <a:solidFill>
-                  <a:srgbClr val="1B1B19"/>
-                </a:solidFill>
-                <a:latin typeface="IBM Plex Sans"/>
-              </a:rPr>
-              <a:t>12 months</a:t>
-            </a:r>
-          </a:p>
-        </p:txBody>
-      </p:sp>
-      <p:sp>
-        <p:nvSpPr>
-          <p:cNvPr id="19" name="TextBox 18"/>
-          <p:cNvSpPr txBox="1"/>
-          <p:nvPr/>
-        </p:nvSpPr>
-        <p:spPr>
-          <a:xfrm>
-            <a:off x="3017520" y="4352544"/>
-            <a:ext cx="8321040" cy="365760"/>
-          </a:xfrm>
-          <a:prstGeom prst="rect">
-            <a:avLst/>
-          </a:prstGeom>
-          <a:noFill/>
-        </p:spPr>
-        <p:txBody>
-          <a:bodyPr wrap="none" lIns="0" rIns="0" tIns="0" bIns="0">
-            <a:spAutoFit/>
-          </a:bodyPr>
-          <a:lstStyle/>
-          <a:p>
-            <a:pPr>
-              <a:lnSpc>
-                <a:spcPct val="130000"/>
-              </a:lnSpc>
-            </a:pPr>
-            <a:r>
-              <a:rPr sz="1300" b="0" i="0">
-                <a:solidFill>
-                  <a:srgbClr val="1B1B19"/>
-                </a:solidFill>
-                <a:latin typeface="IBM Plex Sans"/>
-              </a:rPr>
-              <a:t>Prospective pilot in a diabetes clinic with alert burden and time in range as outcomes.</a:t>
-            </a:r>
-          </a:p>
-        </p:txBody>
-      </p:sp>
-      <p:cxnSp>
-        <p:nvCxnSpPr>
-          <p:cNvPr id="20" name="Connector 19"/>
-          <p:cNvCxnSpPr/>
-          <p:nvPr/>
-        </p:nvCxnSpPr>
-        <p:spPr>
-          <a:xfrm>
-            <a:off x="822960" y="4937759"/>
-            <a:ext cx="10607040" cy="0"/>
-          </a:xfrm>
-          <a:prstGeom prst="line">
-            <a:avLst/>
-          </a:prstGeom>
-          <a:ln w="7620">
-            <a:solidFill>
-              <a:srgbClr val="D8D3C8"/>
-            </a:solidFill>
-          </a:ln>
-        </p:spPr>
-        <p:style>
-          <a:lnRef idx="2">
-            <a:schemeClr val="accent1"/>
-          </a:lnRef>
-          <a:fillRef idx="0">
-            <a:schemeClr val="accent1"/>
-          </a:fillRef>
-          <a:effectRef idx="1">
-            <a:schemeClr val="accent1"/>
-          </a:effectRef>
-          <a:fontRef idx="minor">
-            <a:schemeClr val="tx1"/>
-          </a:fontRef>
-        </p:style>
-      </p:cxnSp>
-      <p:sp>
-        <p:nvSpPr>
-          <p:cNvPr id="21" name="TextBox 20"/>
-          <p:cNvSpPr txBox="1"/>
-          <p:nvPr/>
-        </p:nvSpPr>
-        <p:spPr>
-          <a:xfrm>
-            <a:off x="822960" y="5486400"/>
-            <a:ext cx="10515600" cy="571500"/>
-          </a:xfrm>
-          <a:prstGeom prst="rect">
-            <a:avLst/>
-          </a:prstGeom>
-          <a:noFill/>
-        </p:spPr>
-        <p:txBody>
-          <a:bodyPr wrap="none" lIns="0" rIns="0" tIns="0" bIns="0">
-            <a:spAutoFit/>
-          </a:bodyPr>
-          <a:lstStyle/>
-          <a:p>
-            <a:pPr>
-              <a:lnSpc>
-                <a:spcPct val="135000"/>
-              </a:lnSpc>
-            </a:pPr>
-            <a:r>
-              <a:rPr sz="1400" b="0" i="1">
-                <a:solidFill>
-                  <a:srgbClr val="1B1B19"/>
-                </a:solidFill>
-                <a:latin typeface="IBM Plex Serif"/>
-              </a:rPr>
-              <a:t>Impact: fewer hours above range, earlier review of cardiac drift, and conversations about change grounded in the patient's</a:t>
-            </a:r>
-          </a:p>
-          <a:p>
-            <a:pPr>
-              <a:lnSpc>
-                <a:spcPct val="135000"/>
-              </a:lnSpc>
-            </a:pPr>
-            <a:r>
-              <a:rPr sz="1400" b="0" i="1">
-                <a:solidFill>
-                  <a:srgbClr val="1B1B19"/>
-                </a:solidFill>
-                <a:latin typeface="IBM Plex Serif"/>
-              </a:rPr>
-              <a:t>own physiology.</a:t>
+                  <a:srgbClr val="4A4843"/>
+                </a:solidFill>
+                <a:latin typeface="IBM Plex Sans"/>
+              </a:rPr>
+              <a:t>•  Unlogged meals remain the main source of missed spikes.</a:t>
             </a:r>
           </a:p>
         </p:txBody>
@@ -5901,11 +5438,11 @@
             <a:r>
               <a:rPr sz="1000" b="0" i="0">
                 <a:solidFill>
-                  <a:srgbClr val="75726B"/>
-                </a:solidFill>
-                <a:latin typeface="IBM Plex Sans"/>
-              </a:rPr>
-              <a:t>CONTACT</a:t>
+                  <a:srgbClr val="6A675F"/>
+                </a:solidFill>
+                <a:latin typeface="IBM Plex Sans"/>
+              </a:rPr>
+              <a:t>NEXT</a:t>
             </a:r>
           </a:p>
         </p:txBody>
@@ -5944,7 +5481,7 @@
                 </a:solidFill>
                 <a:latin typeface="IBM Plex Serif"/>
               </a:rPr>
-              <a:t>Team</a:t>
+              <a:t>Impact and roadmap</a:t>
             </a:r>
           </a:p>
         </p:txBody>
@@ -6014,7 +5551,7 @@
             <a:r>
               <a:rPr sz="900" b="0" i="0">
                 <a:solidFill>
-                  <a:srgbClr val="75726B"/>
+                  <a:srgbClr val="6A675F"/>
                 </a:solidFill>
                 <a:latin typeface="IBM Plex Sans"/>
               </a:rPr>
@@ -6031,8 +5568,8 @@
         </p:nvSpPr>
         <p:spPr>
           <a:xfrm>
-            <a:off x="822960" y="1810512"/>
-            <a:ext cx="3200400" cy="365760"/>
+            <a:off x="822960" y="1719072"/>
+            <a:ext cx="2103120" cy="365760"/>
           </a:xfrm>
           <a:prstGeom prst="rect">
             <a:avLst/>
@@ -6051,13 +5588,13 @@
               </a:lnSpc>
             </a:pPr>
             <a:r>
-              <a:rPr sz="1250" b="0" i="0">
-                <a:solidFill>
-                  <a:srgbClr val="75726B"/>
-                </a:solidFill>
-                <a:latin typeface="IBM Plex Sans"/>
-              </a:rPr>
-              <a:t>Name</a:t>
+              <a:rPr sz="1150" b="0" i="0">
+                <a:solidFill>
+                  <a:srgbClr val="6A675F"/>
+                </a:solidFill>
+                <a:latin typeface="IBM Plex Sans"/>
+              </a:rPr>
+              <a:t>Now</a:t>
             </a:r>
           </a:p>
         </p:txBody>
@@ -6070,8 +5607,8 @@
         </p:nvSpPr>
         <p:spPr>
           <a:xfrm>
-            <a:off x="4114800" y="1810512"/>
-            <a:ext cx="3200400" cy="365760"/>
+            <a:off x="3017520" y="1719072"/>
+            <a:ext cx="8321040" cy="365760"/>
           </a:xfrm>
           <a:prstGeom prst="rect">
             <a:avLst/>
@@ -6090,65 +5627,26 @@
               </a:lnSpc>
             </a:pPr>
             <a:r>
-              <a:rPr sz="1250" b="0" i="0">
-                <a:solidFill>
-                  <a:srgbClr val="75726B"/>
-                </a:solidFill>
-                <a:latin typeface="IBM Plex Sans"/>
-              </a:rPr>
-              <a:t>Role</a:t>
-            </a:r>
-          </a:p>
-        </p:txBody>
-      </p:sp>
-      <p:sp>
-        <p:nvSpPr>
-          <p:cNvPr id="8" name="TextBox 7"/>
-          <p:cNvSpPr txBox="1"/>
-          <p:nvPr/>
-        </p:nvSpPr>
-        <p:spPr>
-          <a:xfrm>
-            <a:off x="7406640" y="1810512"/>
-            <a:ext cx="3931920" cy="365760"/>
-          </a:xfrm>
-          <a:prstGeom prst="rect">
-            <a:avLst/>
-          </a:prstGeom>
-          <a:noFill/>
-        </p:spPr>
-        <p:txBody>
-          <a:bodyPr wrap="none" lIns="0" rIns="0" tIns="0" bIns="0">
-            <a:spAutoFit/>
-          </a:bodyPr>
-          <a:lstStyle/>
-          <a:p>
-            <a:pPr>
-              <a:lnSpc>
-                <a:spcPct val="130000"/>
-              </a:lnSpc>
-            </a:pPr>
-            <a:r>
-              <a:rPr sz="1250" b="0" i="0">
-                <a:solidFill>
-                  <a:srgbClr val="75726B"/>
-                </a:solidFill>
-                <a:latin typeface="IBM Plex Sans"/>
-              </a:rPr>
-              <a:t>Email</a:t>
+              <a:rPr sz="1150" b="0" i="0">
+                <a:solidFill>
+                  <a:srgbClr val="6A675F"/>
+                </a:solidFill>
+                <a:latin typeface="IBM Plex Sans"/>
+              </a:rPr>
+              <a:t>Working prototype: data, twin, models, API, dashboard, tests, docs. Reproducible from one seed.</a:t>
             </a:r>
           </a:p>
         </p:txBody>
       </p:sp>
       <p:cxnSp>
         <p:nvCxnSpPr>
-          <p:cNvPr id="9" name="Connector 8"/>
+          <p:cNvPr id="8" name="Connector 7"/>
           <p:cNvCxnSpPr/>
           <p:nvPr/>
         </p:nvCxnSpPr>
         <p:spPr>
           <a:xfrm>
-            <a:off x="822960" y="2286000"/>
+            <a:off x="822960" y="2304288"/>
             <a:ext cx="10607040" cy="0"/>
           </a:xfrm>
           <a:prstGeom prst="line">
@@ -6156,7 +5654,7 @@
           </a:prstGeom>
           <a:ln w="10160">
             <a:solidFill>
-              <a:srgbClr val="75726B"/>
+              <a:srgbClr val="6A675F"/>
             </a:solidFill>
           </a:ln>
         </p:spPr>
@@ -6177,14 +5675,53 @@
       </p:cxnSp>
       <p:sp>
         <p:nvSpPr>
+          <p:cNvPr id="9" name="TextBox 8"/>
+          <p:cNvSpPr txBox="1"/>
+          <p:nvPr/>
+        </p:nvSpPr>
+        <p:spPr>
+          <a:xfrm>
+            <a:off x="822960" y="2377440"/>
+            <a:ext cx="2103120" cy="365760"/>
+          </a:xfrm>
+          <a:prstGeom prst="rect">
+            <a:avLst/>
+          </a:prstGeom>
+          <a:noFill/>
+        </p:spPr>
+        <p:txBody>
+          <a:bodyPr wrap="none" lIns="0" rIns="0" tIns="0" bIns="0">
+            <a:spAutoFit/>
+          </a:bodyPr>
+          <a:lstStyle/>
+          <a:p>
+            <a:pPr>
+              <a:lnSpc>
+                <a:spcPct val="130000"/>
+              </a:lnSpc>
+            </a:pPr>
+            <a:r>
+              <a:rPr sz="1300" b="0" i="0">
+                <a:solidFill>
+                  <a:srgbClr val="1B1B19"/>
+                </a:solidFill>
+                <a:latin typeface="IBM Plex Sans"/>
+              </a:rPr>
+              <a:t>3 months</a:t>
+            </a:r>
+          </a:p>
+        </p:txBody>
+      </p:sp>
+      <p:sp>
+        <p:nvSpPr>
           <p:cNvPr id="10" name="TextBox 9"/>
           <p:cNvSpPr txBox="1"/>
           <p:nvPr/>
         </p:nvSpPr>
         <p:spPr>
           <a:xfrm>
-            <a:off x="822960" y="2359152"/>
-            <a:ext cx="3200400" cy="365760"/>
+            <a:off x="3017520" y="2377440"/>
+            <a:ext cx="8321040" cy="520700"/>
           </a:xfrm>
           <a:prstGeom prst="rect">
             <a:avLst/>
@@ -6203,38 +5740,15 @@
               </a:lnSpc>
             </a:pPr>
             <a:r>
-              <a:rPr sz="1400" b="0" i="0">
-                <a:solidFill>
-                  <a:srgbClr val="1B1B19"/>
-                </a:solidFill>
-                <a:latin typeface="IBM Plex Sans"/>
-              </a:rPr>
-              <a:t>&lt;Member 1&gt;</a:t>
-            </a:r>
-          </a:p>
-        </p:txBody>
-      </p:sp>
-      <p:sp>
-        <p:nvSpPr>
-          <p:cNvPr id="11" name="TextBox 10"/>
-          <p:cNvSpPr txBox="1"/>
-          <p:nvPr/>
-        </p:nvSpPr>
-        <p:spPr>
-          <a:xfrm>
-            <a:off x="4114800" y="2359152"/>
-            <a:ext cx="3200400" cy="365760"/>
-          </a:xfrm>
-          <a:prstGeom prst="rect">
-            <a:avLst/>
-          </a:prstGeom>
-          <a:noFill/>
-        </p:spPr>
-        <p:txBody>
-          <a:bodyPr wrap="none" lIns="0" rIns="0" tIns="0" bIns="0">
-            <a:spAutoFit/>
-          </a:bodyPr>
-          <a:lstStyle/>
+              <a:rPr sz="1300" b="0" i="0">
+                <a:solidFill>
+                  <a:srgbClr val="1B1B19"/>
+                </a:solidFill>
+                <a:latin typeface="IBM Plex Sans"/>
+              </a:rPr>
+              <a:t>Retrospective validation on de-identified CGM and EHR data under an ethics approval; Indian food</a:t>
+            </a:r>
+          </a:p>
           <a:p>
             <a:pPr>
               <a:lnSpc>
@@ -6242,65 +5756,26 @@
               </a:lnSpc>
             </a:pPr>
             <a:r>
-              <a:rPr sz="1400" b="0" i="0">
-                <a:solidFill>
-                  <a:srgbClr val="1B1B19"/>
-                </a:solidFill>
-                <a:latin typeface="IBM Plex Sans"/>
-              </a:rPr>
-              <a:t>&lt;Role&gt;</a:t>
-            </a:r>
-          </a:p>
-        </p:txBody>
-      </p:sp>
-      <p:sp>
-        <p:nvSpPr>
-          <p:cNvPr id="12" name="TextBox 11"/>
-          <p:cNvSpPr txBox="1"/>
-          <p:nvPr/>
-        </p:nvSpPr>
-        <p:spPr>
-          <a:xfrm>
-            <a:off x="7406640" y="2359152"/>
-            <a:ext cx="3931920" cy="365760"/>
-          </a:xfrm>
-          <a:prstGeom prst="rect">
-            <a:avLst/>
-          </a:prstGeom>
-          <a:noFill/>
-        </p:spPr>
-        <p:txBody>
-          <a:bodyPr wrap="none" lIns="0" rIns="0" tIns="0" bIns="0">
-            <a:spAutoFit/>
-          </a:bodyPr>
-          <a:lstStyle/>
-          <a:p>
-            <a:pPr>
-              <a:lnSpc>
-                <a:spcPct val="130000"/>
-              </a:lnSpc>
-            </a:pPr>
-            <a:r>
-              <a:rPr sz="1400" b="0" i="0">
-                <a:solidFill>
-                  <a:srgbClr val="1B1B19"/>
-                </a:solidFill>
-                <a:latin typeface="IBM Plex Sans"/>
-              </a:rPr>
-              <a:t>&lt;email&gt;</a:t>
+              <a:rPr sz="1300" b="0" i="0">
+                <a:solidFill>
+                  <a:srgbClr val="1B1B19"/>
+                </a:solidFill>
+                <a:latin typeface="IBM Plex Sans"/>
+              </a:rPr>
+              <a:t>absorption library.</a:t>
             </a:r>
           </a:p>
         </p:txBody>
       </p:sp>
       <p:cxnSp>
         <p:nvCxnSpPr>
-          <p:cNvPr id="13" name="Connector 12"/>
+          <p:cNvPr id="11" name="Connector 10"/>
           <p:cNvCxnSpPr/>
           <p:nvPr/>
         </p:nvCxnSpPr>
         <p:spPr>
           <a:xfrm>
-            <a:off x="822960" y="2834640"/>
+            <a:off x="822960" y="2962656"/>
             <a:ext cx="10607040" cy="0"/>
           </a:xfrm>
           <a:prstGeom prst="line">
@@ -6329,14 +5804,14 @@
       </p:cxnSp>
       <p:sp>
         <p:nvSpPr>
-          <p:cNvPr id="14" name="TextBox 13"/>
-          <p:cNvSpPr txBox="1"/>
-          <p:nvPr/>
-        </p:nvSpPr>
-        <p:spPr>
-          <a:xfrm>
-            <a:off x="822960" y="2907792"/>
-            <a:ext cx="3200400" cy="365760"/>
+          <p:cNvPr id="12" name="TextBox 11"/>
+          <p:cNvSpPr txBox="1"/>
+          <p:nvPr/>
+        </p:nvSpPr>
+        <p:spPr>
+          <a:xfrm>
+            <a:off x="822960" y="3035808"/>
+            <a:ext cx="2103120" cy="365760"/>
           </a:xfrm>
           <a:prstGeom prst="rect">
             <a:avLst/>
@@ -6355,27 +5830,27 @@
               </a:lnSpc>
             </a:pPr>
             <a:r>
-              <a:rPr sz="1400" b="0" i="0">
-                <a:solidFill>
-                  <a:srgbClr val="1B1B19"/>
-                </a:solidFill>
-                <a:latin typeface="IBM Plex Sans"/>
-              </a:rPr>
-              <a:t>&lt;Member 2&gt;</a:t>
-            </a:r>
-          </a:p>
-        </p:txBody>
-      </p:sp>
-      <p:sp>
-        <p:nvSpPr>
-          <p:cNvPr id="15" name="TextBox 14"/>
-          <p:cNvSpPr txBox="1"/>
-          <p:nvPr/>
-        </p:nvSpPr>
-        <p:spPr>
-          <a:xfrm>
-            <a:off x="4114800" y="2907792"/>
-            <a:ext cx="3200400" cy="365760"/>
+              <a:rPr sz="1300" b="0" i="0">
+                <a:solidFill>
+                  <a:srgbClr val="1B1B19"/>
+                </a:solidFill>
+                <a:latin typeface="IBM Plex Sans"/>
+              </a:rPr>
+              <a:t>6 months</a:t>
+            </a:r>
+          </a:p>
+        </p:txBody>
+      </p:sp>
+      <p:sp>
+        <p:nvSpPr>
+          <p:cNvPr id="13" name="TextBox 12"/>
+          <p:cNvSpPr txBox="1"/>
+          <p:nvPr/>
+        </p:nvSpPr>
+        <p:spPr>
+          <a:xfrm>
+            <a:off x="3017520" y="3035808"/>
+            <a:ext cx="8321040" cy="520700"/>
           </a:xfrm>
           <a:prstGeom prst="rect">
             <a:avLst/>
@@ -6394,38 +5869,15 @@
               </a:lnSpc>
             </a:pPr>
             <a:r>
-              <a:rPr sz="1400" b="0" i="0">
-                <a:solidFill>
-                  <a:srgbClr val="1B1B19"/>
-                </a:solidFill>
-                <a:latin typeface="IBM Plex Sans"/>
-              </a:rPr>
-              <a:t>&lt;Role&gt;</a:t>
-            </a:r>
-          </a:p>
-        </p:txBody>
-      </p:sp>
-      <p:sp>
-        <p:nvSpPr>
-          <p:cNvPr id="16" name="TextBox 15"/>
-          <p:cNvSpPr txBox="1"/>
-          <p:nvPr/>
-        </p:nvSpPr>
-        <p:spPr>
-          <a:xfrm>
-            <a:off x="7406640" y="2907792"/>
-            <a:ext cx="3931920" cy="365760"/>
-          </a:xfrm>
-          <a:prstGeom prst="rect">
-            <a:avLst/>
-          </a:prstGeom>
-          <a:noFill/>
-        </p:spPr>
-        <p:txBody>
-          <a:bodyPr wrap="none" lIns="0" rIns="0" tIns="0" bIns="0">
-            <a:spAutoFit/>
-          </a:bodyPr>
-          <a:lstStyle/>
+              <a:rPr sz="1300" b="0" i="0">
+                <a:solidFill>
+                  <a:srgbClr val="1B1B19"/>
+                </a:solidFill>
+                <a:latin typeface="IBM Plex Sans"/>
+              </a:rPr>
+              <a:t>Federated learning of the residual model across hospitals; the twin stays per patient, only model updates</a:t>
+            </a:r>
+          </a:p>
           <a:p>
             <a:pPr>
               <a:lnSpc>
@@ -6433,26 +5885,26 @@
               </a:lnSpc>
             </a:pPr>
             <a:r>
-              <a:rPr sz="1400" b="0" i="0">
-                <a:solidFill>
-                  <a:srgbClr val="1B1B19"/>
-                </a:solidFill>
-                <a:latin typeface="IBM Plex Sans"/>
-              </a:rPr>
-              <a:t>&lt;email&gt;</a:t>
+              <a:rPr sz="1300" b="0" i="0">
+                <a:solidFill>
+                  <a:srgbClr val="1B1B19"/>
+                </a:solidFill>
+                <a:latin typeface="IBM Plex Sans"/>
+              </a:rPr>
+              <a:t>move.</a:t>
             </a:r>
           </a:p>
         </p:txBody>
       </p:sp>
       <p:cxnSp>
         <p:nvCxnSpPr>
-          <p:cNvPr id="17" name="Connector 16"/>
+          <p:cNvPr id="14" name="Connector 13"/>
           <p:cNvCxnSpPr/>
           <p:nvPr/>
         </p:nvCxnSpPr>
         <p:spPr>
           <a:xfrm>
-            <a:off x="822960" y="3383280"/>
+            <a:off x="822960" y="3621024"/>
             <a:ext cx="10607040" cy="0"/>
           </a:xfrm>
           <a:prstGeom prst="line">
@@ -6481,14 +5933,14 @@
       </p:cxnSp>
       <p:sp>
         <p:nvSpPr>
-          <p:cNvPr id="18" name="TextBox 17"/>
-          <p:cNvSpPr txBox="1"/>
-          <p:nvPr/>
-        </p:nvSpPr>
-        <p:spPr>
-          <a:xfrm>
-            <a:off x="822960" y="3456432"/>
-            <a:ext cx="3200400" cy="365760"/>
+          <p:cNvPr id="15" name="TextBox 14"/>
+          <p:cNvSpPr txBox="1"/>
+          <p:nvPr/>
+        </p:nvSpPr>
+        <p:spPr>
+          <a:xfrm>
+            <a:off x="822960" y="3694176"/>
+            <a:ext cx="2103120" cy="365760"/>
           </a:xfrm>
           <a:prstGeom prst="rect">
             <a:avLst/>
@@ -6507,27 +5959,27 @@
               </a:lnSpc>
             </a:pPr>
             <a:r>
-              <a:rPr sz="1400" b="0" i="0">
-                <a:solidFill>
-                  <a:srgbClr val="1B1B19"/>
-                </a:solidFill>
-                <a:latin typeface="IBM Plex Sans"/>
-              </a:rPr>
-              <a:t>&lt;Member 3&gt;</a:t>
-            </a:r>
-          </a:p>
-        </p:txBody>
-      </p:sp>
-      <p:sp>
-        <p:nvSpPr>
-          <p:cNvPr id="19" name="TextBox 18"/>
-          <p:cNvSpPr txBox="1"/>
-          <p:nvPr/>
-        </p:nvSpPr>
-        <p:spPr>
-          <a:xfrm>
-            <a:off x="4114800" y="3456432"/>
-            <a:ext cx="3200400" cy="365760"/>
+              <a:rPr sz="1300" b="0" i="0">
+                <a:solidFill>
+                  <a:srgbClr val="1B1B19"/>
+                </a:solidFill>
+                <a:latin typeface="IBM Plex Sans"/>
+              </a:rPr>
+              <a:t>9 months</a:t>
+            </a:r>
+          </a:p>
+        </p:txBody>
+      </p:sp>
+      <p:sp>
+        <p:nvSpPr>
+          <p:cNvPr id="16" name="TextBox 15"/>
+          <p:cNvSpPr txBox="1"/>
+          <p:nvPr/>
+        </p:nvSpPr>
+        <p:spPr>
+          <a:xfrm>
+            <a:off x="3017520" y="3694176"/>
+            <a:ext cx="8321040" cy="365760"/>
           </a:xfrm>
           <a:prstGeom prst="rect">
             <a:avLst/>
@@ -6546,65 +5998,26 @@
               </a:lnSpc>
             </a:pPr>
             <a:r>
-              <a:rPr sz="1400" b="0" i="0">
-                <a:solidFill>
-                  <a:srgbClr val="1B1B19"/>
-                </a:solidFill>
-                <a:latin typeface="IBM Plex Sans"/>
-              </a:rPr>
-              <a:t>&lt;Role&gt;</a:t>
-            </a:r>
-          </a:p>
-        </p:txBody>
-      </p:sp>
-      <p:sp>
-        <p:nvSpPr>
-          <p:cNvPr id="20" name="TextBox 19"/>
-          <p:cNvSpPr txBox="1"/>
-          <p:nvPr/>
-        </p:nvSpPr>
-        <p:spPr>
-          <a:xfrm>
-            <a:off x="7406640" y="3456432"/>
-            <a:ext cx="3931920" cy="365760"/>
-          </a:xfrm>
-          <a:prstGeom prst="rect">
-            <a:avLst/>
-          </a:prstGeom>
-          <a:noFill/>
-        </p:spPr>
-        <p:txBody>
-          <a:bodyPr wrap="none" lIns="0" rIns="0" tIns="0" bIns="0">
-            <a:spAutoFit/>
-          </a:bodyPr>
-          <a:lstStyle/>
-          <a:p>
-            <a:pPr>
-              <a:lnSpc>
-                <a:spcPct val="130000"/>
-              </a:lnSpc>
-            </a:pPr>
-            <a:r>
-              <a:rPr sz="1400" b="0" i="0">
-                <a:solidFill>
-                  <a:srgbClr val="1B1B19"/>
-                </a:solidFill>
-                <a:latin typeface="IBM Plex Sans"/>
-              </a:rPr>
-              <a:t>&lt;email&gt;</a:t>
+              <a:rPr sz="1300" b="0" i="0">
+                <a:solidFill>
+                  <a:srgbClr val="1B1B19"/>
+                </a:solidFill>
+                <a:latin typeface="IBM Plex Sans"/>
+              </a:rPr>
+              <a:t>ABDM integration (health ID, consent manager, FHIR); real device APIs (Libre, Dexcom, Health Connect).</a:t>
             </a:r>
           </a:p>
         </p:txBody>
       </p:sp>
       <p:cxnSp>
         <p:nvCxnSpPr>
-          <p:cNvPr id="21" name="Connector 20"/>
+          <p:cNvPr id="17" name="Connector 16"/>
           <p:cNvCxnSpPr/>
           <p:nvPr/>
         </p:nvCxnSpPr>
         <p:spPr>
           <a:xfrm>
-            <a:off x="822960" y="3931920"/>
+            <a:off x="822960" y="4279392"/>
             <a:ext cx="10607040" cy="0"/>
           </a:xfrm>
           <a:prstGeom prst="line">
@@ -6633,14 +6046,14 @@
       </p:cxnSp>
       <p:sp>
         <p:nvSpPr>
-          <p:cNvPr id="22" name="TextBox 21"/>
-          <p:cNvSpPr txBox="1"/>
-          <p:nvPr/>
-        </p:nvSpPr>
-        <p:spPr>
-          <a:xfrm>
-            <a:off x="822960" y="4005072"/>
-            <a:ext cx="3200400" cy="365760"/>
+          <p:cNvPr id="18" name="TextBox 17"/>
+          <p:cNvSpPr txBox="1"/>
+          <p:nvPr/>
+        </p:nvSpPr>
+        <p:spPr>
+          <a:xfrm>
+            <a:off x="822960" y="4352544"/>
+            <a:ext cx="2103120" cy="365760"/>
           </a:xfrm>
           <a:prstGeom prst="rect">
             <a:avLst/>
@@ -6659,27 +6072,27 @@
               </a:lnSpc>
             </a:pPr>
             <a:r>
-              <a:rPr sz="1400" b="0" i="0">
-                <a:solidFill>
-                  <a:srgbClr val="1B1B19"/>
-                </a:solidFill>
-                <a:latin typeface="IBM Plex Sans"/>
-              </a:rPr>
-              <a:t>&lt;Member 4&gt;</a:t>
-            </a:r>
-          </a:p>
-        </p:txBody>
-      </p:sp>
-      <p:sp>
-        <p:nvSpPr>
-          <p:cNvPr id="23" name="TextBox 22"/>
-          <p:cNvSpPr txBox="1"/>
-          <p:nvPr/>
-        </p:nvSpPr>
-        <p:spPr>
-          <a:xfrm>
-            <a:off x="4114800" y="4005072"/>
-            <a:ext cx="3200400" cy="365760"/>
+              <a:rPr sz="1300" b="0" i="0">
+                <a:solidFill>
+                  <a:srgbClr val="1B1B19"/>
+                </a:solidFill>
+                <a:latin typeface="IBM Plex Sans"/>
+              </a:rPr>
+              <a:t>12 months</a:t>
+            </a:r>
+          </a:p>
+        </p:txBody>
+      </p:sp>
+      <p:sp>
+        <p:nvSpPr>
+          <p:cNvPr id="19" name="TextBox 18"/>
+          <p:cNvSpPr txBox="1"/>
+          <p:nvPr/>
+        </p:nvSpPr>
+        <p:spPr>
+          <a:xfrm>
+            <a:off x="3017520" y="4352544"/>
+            <a:ext cx="8321040" cy="365760"/>
           </a:xfrm>
           <a:prstGeom prst="rect">
             <a:avLst/>
@@ -6698,65 +6111,26 @@
               </a:lnSpc>
             </a:pPr>
             <a:r>
-              <a:rPr sz="1400" b="0" i="0">
-                <a:solidFill>
-                  <a:srgbClr val="1B1B19"/>
-                </a:solidFill>
-                <a:latin typeface="IBM Plex Sans"/>
-              </a:rPr>
-              <a:t>&lt;Role&gt;</a:t>
-            </a:r>
-          </a:p>
-        </p:txBody>
-      </p:sp>
-      <p:sp>
-        <p:nvSpPr>
-          <p:cNvPr id="24" name="TextBox 23"/>
-          <p:cNvSpPr txBox="1"/>
-          <p:nvPr/>
-        </p:nvSpPr>
-        <p:spPr>
-          <a:xfrm>
-            <a:off x="7406640" y="4005072"/>
-            <a:ext cx="3931920" cy="365760"/>
-          </a:xfrm>
-          <a:prstGeom prst="rect">
-            <a:avLst/>
-          </a:prstGeom>
-          <a:noFill/>
-        </p:spPr>
-        <p:txBody>
-          <a:bodyPr wrap="none" lIns="0" rIns="0" tIns="0" bIns="0">
-            <a:spAutoFit/>
-          </a:bodyPr>
-          <a:lstStyle/>
-          <a:p>
-            <a:pPr>
-              <a:lnSpc>
-                <a:spcPct val="130000"/>
-              </a:lnSpc>
-            </a:pPr>
-            <a:r>
-              <a:rPr sz="1400" b="0" i="0">
-                <a:solidFill>
-                  <a:srgbClr val="1B1B19"/>
-                </a:solidFill>
-                <a:latin typeface="IBM Plex Sans"/>
-              </a:rPr>
-              <a:t>&lt;email&gt;</a:t>
+              <a:rPr sz="1300" b="0" i="0">
+                <a:solidFill>
+                  <a:srgbClr val="1B1B19"/>
+                </a:solidFill>
+                <a:latin typeface="IBM Plex Sans"/>
+              </a:rPr>
+              <a:t>Prospective pilot in a diabetes clinic with alert burden and time in range as outcomes.</a:t>
             </a:r>
           </a:p>
         </p:txBody>
       </p:sp>
       <p:cxnSp>
         <p:nvCxnSpPr>
-          <p:cNvPr id="25" name="Connector 24"/>
+          <p:cNvPr id="20" name="Connector 19"/>
           <p:cNvCxnSpPr/>
           <p:nvPr/>
         </p:nvCxnSpPr>
         <p:spPr>
           <a:xfrm>
-            <a:off x="822960" y="4480559"/>
+            <a:off x="822960" y="4937759"/>
             <a:ext cx="10607040" cy="0"/>
           </a:xfrm>
           <a:prstGeom prst="line">
@@ -6785,13 +6159,68 @@
       </p:cxnSp>
       <p:sp>
         <p:nvSpPr>
-          <p:cNvPr id="26" name="TextBox 25"/>
-          <p:cNvSpPr txBox="1"/>
-          <p:nvPr/>
-        </p:nvSpPr>
-        <p:spPr>
-          <a:xfrm>
-            <a:off x="822960" y="4937760"/>
+          <p:cNvPr id="21" name="TextBox 20"/>
+          <p:cNvSpPr txBox="1"/>
+          <p:nvPr/>
+        </p:nvSpPr>
+        <p:spPr>
+          <a:xfrm>
+            <a:off x="822960" y="5349240"/>
+            <a:ext cx="10515600" cy="571500"/>
+          </a:xfrm>
+          <a:prstGeom prst="rect">
+            <a:avLst/>
+          </a:prstGeom>
+          <a:noFill/>
+        </p:spPr>
+        <p:txBody>
+          <a:bodyPr wrap="none" lIns="0" rIns="0" tIns="0" bIns="0">
+            <a:spAutoFit/>
+          </a:bodyPr>
+          <a:lstStyle/>
+          <a:p>
+            <a:pPr>
+              <a:lnSpc>
+                <a:spcPct val="135000"/>
+              </a:lnSpc>
+            </a:pPr>
+            <a:r>
+              <a:rPr sz="1400" b="0" i="1">
+                <a:solidFill>
+                  <a:srgbClr val="1B1B19"/>
+                </a:solidFill>
+                <a:latin typeface="IBM Plex Serif"/>
+              </a:rPr>
+              <a:t>Impact: fewer hours above range, earlier review of cardiac drift, and conversations about change grounded in the patient's</a:t>
+            </a:r>
+          </a:p>
+          <a:p>
+            <a:pPr>
+              <a:lnSpc>
+                <a:spcPct val="135000"/>
+              </a:lnSpc>
+            </a:pPr>
+            <a:r>
+              <a:rPr sz="1400" b="0" i="1">
+                <a:solidFill>
+                  <a:srgbClr val="1B1B19"/>
+                </a:solidFill>
+                <a:latin typeface="IBM Plex Serif"/>
+              </a:rPr>
+              <a:t>own physiology.</a:t>
+            </a:r>
+          </a:p>
+        </p:txBody>
+      </p:sp>
+      <p:sp>
+        <p:nvSpPr>
+          <p:cNvPr id="22" name="TextBox 21"/>
+          <p:cNvSpPr txBox="1"/>
+          <p:nvPr/>
+        </p:nvSpPr>
+        <p:spPr>
+          <a:xfrm>
+            <a:off x="822960" y="5989320"/>
             <a:ext cx="10515600" cy="365760"/>
           </a:xfrm>
           <a:prstGeom prst="rect">
@@ -6811,52 +6240,13 @@
               </a:lnSpc>
             </a:pPr>
             <a:r>
-              <a:rPr sz="1400" b="0" i="0">
+              <a:rPr sz="1300" b="0" i="0">
                 <a:solidFill>
                   <a:srgbClr val="4A4843"/>
                 </a:solidFill>
                 <a:latin typeface="IBM Plex Sans"/>
               </a:rPr>
-              <a:t>&lt;CollegeName&gt; / &lt;Incubator&gt;.  Code: &lt;public repository URL&gt;.  Demo video: &lt;unlisted YouTube URL&gt;.</a:t>
-            </a:r>
-          </a:p>
-        </p:txBody>
-      </p:sp>
-      <p:sp>
-        <p:nvSpPr>
-          <p:cNvPr id="27" name="TextBox 26"/>
-          <p:cNvSpPr txBox="1"/>
-          <p:nvPr/>
-        </p:nvSpPr>
-        <p:spPr>
-          <a:xfrm>
-            <a:off x="822960" y="5760720"/>
-            <a:ext cx="10515600" cy="468630"/>
-          </a:xfrm>
-          <a:prstGeom prst="rect">
-            <a:avLst/>
-          </a:prstGeom>
-          <a:noFill/>
-        </p:spPr>
-        <p:txBody>
-          <a:bodyPr wrap="none" lIns="0" rIns="0" tIns="0" bIns="0">
-            <a:spAutoFit/>
-          </a:bodyPr>
-          <a:lstStyle/>
-          <a:p>
-            <a:pPr>
-              <a:lnSpc>
-                <a:spcPct val="135000"/>
-              </a:lnSpc>
-            </a:pPr>
-            <a:r>
-              <a:rPr sz="2200" b="0" i="0">
-                <a:solidFill>
-                  <a:srgbClr val="1B1B19"/>
-                </a:solidFill>
-                <a:latin typeface="IBM Plex Serif"/>
-              </a:rPr>
-              <a:t>Thank you.</a:t>
+              <a:t>Code: &lt;public repository URL&gt;.  Demo video: &lt;unlisted YouTube URL&gt;.  Thank you.</a:t>
             </a:r>
           </a:p>
         </p:txBody>
@@ -6917,7 +6307,7 @@
             <a:r>
               <a:rPr sz="1000" b="0" i="0">
                 <a:solidFill>
-                  <a:srgbClr val="75726B"/>
+                  <a:srgbClr val="6A675F"/>
                 </a:solidFill>
                 <a:latin typeface="IBM Plex Sans"/>
               </a:rPr>
@@ -7030,7 +6420,7 @@
             <a:r>
               <a:rPr sz="900" b="0" i="0">
                 <a:solidFill>
-                  <a:srgbClr val="75726B"/>
+                  <a:srgbClr val="6A675F"/>
                 </a:solidFill>
                 <a:latin typeface="IBM Plex Sans"/>
               </a:rPr>
@@ -7551,7 +6941,7 @@
             <a:r>
               <a:rPr sz="1000" b="0" i="0">
                 <a:solidFill>
-                  <a:srgbClr val="75726B"/>
+                  <a:srgbClr val="6A675F"/>
                 </a:solidFill>
                 <a:latin typeface="IBM Plex Sans"/>
               </a:rPr>
@@ -7664,7 +7054,7 @@
             <a:r>
               <a:rPr sz="900" b="0" i="0">
                 <a:solidFill>
-                  <a:srgbClr val="75726B"/>
+                  <a:srgbClr val="6A675F"/>
                 </a:solidFill>
                 <a:latin typeface="IBM Plex Sans"/>
               </a:rPr>
@@ -7703,7 +7093,7 @@
             <a:r>
               <a:rPr sz="1200" b="0" i="0">
                 <a:solidFill>
-                  <a:srgbClr val="75726B"/>
+                  <a:srgbClr val="6A675F"/>
                 </a:solidFill>
                 <a:latin typeface="IBM Plex Sans"/>
               </a:rPr>
@@ -7742,7 +7132,7 @@
             <a:r>
               <a:rPr sz="1200" b="0" i="0">
                 <a:solidFill>
-                  <a:srgbClr val="75726B"/>
+                  <a:srgbClr val="6A675F"/>
                 </a:solidFill>
                 <a:latin typeface="IBM Plex Sans"/>
               </a:rPr>
@@ -7781,7 +7171,7 @@
             <a:r>
               <a:rPr sz="1200" b="0" i="0">
                 <a:solidFill>
-                  <a:srgbClr val="75726B"/>
+                  <a:srgbClr val="6A675F"/>
                 </a:solidFill>
                 <a:latin typeface="IBM Plex Sans"/>
               </a:rPr>
@@ -7806,7 +7196,7 @@
           </a:prstGeom>
           <a:ln w="10160">
             <a:solidFill>
-              <a:srgbClr val="75726B"/>
+              <a:srgbClr val="6A675F"/>
             </a:solidFill>
           </a:ln>
         </p:spPr>
@@ -8864,7 +8254,7 @@
             <a:r>
               <a:rPr sz="1000" b="0" i="0">
                 <a:solidFill>
-                  <a:srgbClr val="75726B"/>
+                  <a:srgbClr val="6A675F"/>
                 </a:solidFill>
                 <a:latin typeface="IBM Plex Sans"/>
               </a:rPr>
@@ -8977,7 +8367,7 @@
             <a:r>
               <a:rPr sz="900" b="0" i="0">
                 <a:solidFill>
-                  <a:srgbClr val="75726B"/>
+                  <a:srgbClr val="6A675F"/>
                 </a:solidFill>
                 <a:latin typeface="IBM Plex Sans"/>
               </a:rPr>
@@ -9498,7 +8888,7 @@
             <a:r>
               <a:rPr sz="1000" b="0" i="0">
                 <a:solidFill>
-                  <a:srgbClr val="75726B"/>
+                  <a:srgbClr val="6A675F"/>
                 </a:solidFill>
                 <a:latin typeface="IBM Plex Sans"/>
               </a:rPr>
@@ -9611,7 +9001,7 @@
             <a:r>
               <a:rPr sz="900" b="0" i="0">
                 <a:solidFill>
-                  <a:srgbClr val="75726B"/>
+                  <a:srgbClr val="6A675F"/>
                 </a:solidFill>
                 <a:latin typeface="IBM Plex Sans"/>
               </a:rPr>
@@ -9700,7 +9090,7 @@
             <a:r>
               <a:rPr sz="1000" b="0" i="0">
                 <a:solidFill>
-                  <a:srgbClr val="75726B"/>
+                  <a:srgbClr val="6A675F"/>
                 </a:solidFill>
                 <a:latin typeface="IBM Plex Sans"/>
               </a:rPr>
@@ -9813,7 +9203,7 @@
             <a:r>
               <a:rPr sz="900" b="0" i="0">
                 <a:solidFill>
-                  <a:srgbClr val="75726B"/>
+                  <a:srgbClr val="6A675F"/>
                 </a:solidFill>
                 <a:latin typeface="IBM Plex Sans"/>
               </a:rPr>
@@ -10160,7 +9550,7 @@
             <a:r>
               <a:rPr sz="1100" b="0" i="0">
                 <a:solidFill>
-                  <a:srgbClr val="75726B"/>
+                  <a:srgbClr val="6A675F"/>
                 </a:solidFill>
                 <a:latin typeface="IBM Plex Sans"/>
               </a:rPr>
@@ -10225,7 +9615,7 @@
             <a:r>
               <a:rPr sz="1000" b="0" i="0">
                 <a:solidFill>
-                  <a:srgbClr val="75726B"/>
+                  <a:srgbClr val="6A675F"/>
                 </a:solidFill>
                 <a:latin typeface="IBM Plex Sans"/>
               </a:rPr>
@@ -10338,7 +9728,7 @@
             <a:r>
               <a:rPr sz="900" b="0" i="0">
                 <a:solidFill>
-                  <a:srgbClr val="75726B"/>
+                  <a:srgbClr val="6A675F"/>
                 </a:solidFill>
                 <a:latin typeface="IBM Plex Sans"/>
               </a:rPr>
@@ -10377,7 +9767,7 @@
             <a:r>
               <a:rPr sz="1100" b="0" i="0">
                 <a:solidFill>
-                  <a:srgbClr val="75726B"/>
+                  <a:srgbClr val="6A675F"/>
                 </a:solidFill>
                 <a:latin typeface="IBM Plex Sans"/>
               </a:rPr>
@@ -10416,7 +9806,7 @@
             <a:r>
               <a:rPr sz="1100" b="0" i="0">
                 <a:solidFill>
-                  <a:srgbClr val="75726B"/>
+                  <a:srgbClr val="6A675F"/>
                 </a:solidFill>
                 <a:latin typeface="IBM Plex Sans"/>
               </a:rPr>
@@ -10441,7 +9831,7 @@
           </a:prstGeom>
           <a:ln w="10160">
             <a:solidFill>
-              <a:srgbClr val="75726B"/>
+              <a:srgbClr val="6A675F"/>
             </a:solidFill>
           </a:ln>
         </p:spPr>
@@ -11226,7 +10616,7 @@
             <a:r>
               <a:rPr sz="1000" b="0" i="0">
                 <a:solidFill>
-                  <a:srgbClr val="75726B"/>
+                  <a:srgbClr val="6A675F"/>
                 </a:solidFill>
                 <a:latin typeface="IBM Plex Sans"/>
               </a:rPr>
@@ -11339,7 +10729,7 @@
             <a:r>
               <a:rPr sz="900" b="0" i="0">
                 <a:solidFill>
-                  <a:srgbClr val="75726B"/>
+                  <a:srgbClr val="6A675F"/>
                 </a:solidFill>
                 <a:latin typeface="IBM Plex Sans"/>
               </a:rPr>
@@ -11402,7 +10792,7 @@
             <a:r>
               <a:rPr sz="1150" b="0" i="0">
                 <a:solidFill>
-                  <a:srgbClr val="75726B"/>
+                  <a:srgbClr val="6A675F"/>
                 </a:solidFill>
                 <a:latin typeface="IBM Plex Sans"/>
               </a:rPr>
@@ -11441,7 +10831,7 @@
             <a:r>
               <a:rPr sz="1150" b="0" i="0">
                 <a:solidFill>
-                  <a:srgbClr val="75726B"/>
+                  <a:srgbClr val="6A675F"/>
                 </a:solidFill>
                 <a:latin typeface="IBM Plex Sans"/>
               </a:rPr>
@@ -11480,7 +10870,7 @@
             <a:r>
               <a:rPr sz="1150" b="0" i="0">
                 <a:solidFill>
-                  <a:srgbClr val="75726B"/>
+                  <a:srgbClr val="6A675F"/>
                 </a:solidFill>
                 <a:latin typeface="IBM Plex Sans"/>
               </a:rPr>
@@ -11519,7 +10909,7 @@
             <a:r>
               <a:rPr sz="1150" b="0" i="0">
                 <a:solidFill>
-                  <a:srgbClr val="75726B"/>
+                  <a:srgbClr val="6A675F"/>
                 </a:solidFill>
                 <a:latin typeface="IBM Plex Sans"/>
               </a:rPr>
@@ -11544,7 +10934,7 @@
           </a:prstGeom>
           <a:ln w="10160">
             <a:solidFill>
-              <a:srgbClr val="75726B"/>
+              <a:srgbClr val="6A675F"/>
             </a:solidFill>
           </a:ln>
         </p:spPr>
@@ -12428,7 +11818,7 @@
             <a:r>
               <a:rPr sz="1200" b="0" i="0">
                 <a:solidFill>
-                  <a:srgbClr val="75726B"/>
+                  <a:srgbClr val="6A675F"/>
                 </a:solidFill>
                 <a:latin typeface="IBM Plex Sans"/>
               </a:rPr>
@@ -12493,7 +11883,7 @@
             <a:r>
               <a:rPr sz="1000" b="0" i="0">
                 <a:solidFill>
-                  <a:srgbClr val="75726B"/>
+                  <a:srgbClr val="6A675F"/>
                 </a:solidFill>
                 <a:latin typeface="IBM Plex Sans"/>
               </a:rPr>
@@ -12606,7 +11996,7 @@
             <a:r>
               <a:rPr sz="900" b="0" i="0">
                 <a:solidFill>
-                  <a:srgbClr val="75726B"/>
+                  <a:srgbClr val="6A675F"/>
                 </a:solidFill>
                 <a:latin typeface="IBM Plex Sans"/>
               </a:rPr>

--- a/docs/presentation.pptx
+++ b/docs/presentation.pptx
@@ -4626,7 +4626,7 @@
         <p:spPr>
           <a:xfrm>
             <a:off x="6263640" y="1325880"/>
-            <a:ext cx="5191690" cy="3694176"/>
+            <a:ext cx="4324607" cy="3694176"/>
           </a:xfrm>
           <a:prstGeom prst="rect">
             <a:avLst/>
@@ -9508,7 +9508,7 @@
         <p:spPr>
           <a:xfrm>
             <a:off x="6583680" y="1554480"/>
-            <a:ext cx="4195280" cy="4480560"/>
+            <a:ext cx="4937760" cy="4066519"/>
           </a:xfrm>
           <a:prstGeom prst="rect">
             <a:avLst/>

--- a/docs/presentation.pptx
+++ b/docs/presentation.pptx
@@ -4626,7 +4626,7 @@
         <p:spPr>
           <a:xfrm>
             <a:off x="6263640" y="1325880"/>
-            <a:ext cx="4324607" cy="3694176"/>
+            <a:ext cx="5394960" cy="3558275"/>
           </a:xfrm>
           <a:prstGeom prst="rect">
             <a:avLst/>
@@ -9508,7 +9508,7 @@
         <p:spPr>
           <a:xfrm>
             <a:off x="6583680" y="1554480"/>
-            <a:ext cx="4937760" cy="4066519"/>
+            <a:ext cx="3721395" cy="4480560"/>
           </a:xfrm>
           <a:prstGeom prst="rect">
             <a:avLst/>

--- a/docs/presentation.pptx
+++ b/docs/presentation.pptx
@@ -3629,48 +3629,80 @@
         <p:spPr>
           <a:xfrm>
             <a:off x="822960" y="5257800"/>
-            <a:ext cx="10607040" cy="537210"/>
-          </a:xfrm>
-          <a:prstGeom prst="rect">
-            <a:avLst/>
-          </a:prstGeom>
-          <a:noFill/>
-        </p:spPr>
-        <p:txBody>
-          <a:bodyPr wrap="none" lIns="0" rIns="0" tIns="0" bIns="0">
-            <a:spAutoFit/>
-          </a:bodyPr>
-          <a:lstStyle/>
-          <a:p>
-            <a:pPr>
-              <a:lnSpc>
-                <a:spcPct val="135000"/>
-              </a:lnSpc>
-            </a:pPr>
-            <a:r>
-              <a:rPr sz="1300" b="0" i="0">
+            <a:ext cx="10607040" cy="948690"/>
+          </a:xfrm>
+          <a:prstGeom prst="rect">
+            <a:avLst/>
+          </a:prstGeom>
+          <a:noFill/>
+        </p:spPr>
+        <p:txBody>
+          <a:bodyPr wrap="none" lIns="0" rIns="0" tIns="0" bIns="0">
+            <a:spAutoFit/>
+          </a:bodyPr>
+          <a:lstStyle/>
+          <a:p>
+            <a:pPr>
+              <a:lnSpc>
+                <a:spcPct val="135000"/>
+              </a:lnSpc>
+            </a:pPr>
+            <a:r>
+              <a:rPr sz="1250" b="0" i="0">
                 <a:solidFill>
                   <a:srgbClr val="4A4843"/>
                 </a:solidFill>
                 <a:latin typeface="IBM Plex Sans"/>
               </a:rPr>
-              <a:t>Ensemble AUROC 0.95 (95% CI 0.90 to 0.99), AUPRC 0.36 at 2.5% prevalence, sensitivity 88% at 90% specificity. At the 95% specificity</a:t>
-            </a:r>
-          </a:p>
-          <a:p>
-            <a:pPr>
-              <a:lnSpc>
-                <a:spcPct val="135000"/>
-              </a:lnSpc>
-            </a:pPr>
-            <a:r>
-              <a:rPr sz="1300" b="0" i="0">
+              <a:t>Ensemble AUROC 0.95 (95% CI 0.90 to 0.99), AUPRC 0.36 at 2.5% prevalence, sensitivity 88% at 90% specificity. At the 95% specificity operating</a:t>
+            </a:r>
+          </a:p>
+          <a:p>
+            <a:pPr>
+              <a:lnSpc>
+                <a:spcPct val="135000"/>
+              </a:lnSpc>
+            </a:pPr>
+            <a:r>
+              <a:rPr sz="1250" b="0" i="0">
                 <a:solidFill>
                   <a:srgbClr val="4A4843"/>
                 </a:solidFill>
                 <a:latin typeface="IBM Plex Sans"/>
               </a:rPr>
-              <a:t>operating point 5 of 6 test events were flagged up to 3 days ahead. Only 6 test events, so intervals are wide.</a:t>
+              <a:t>point 5 of 6 test events were flagged up to 3 days ahead. Only 6 test events, so intervals are wide. The events come from our own simulator:</a:t>
+            </a:r>
+          </a:p>
+          <a:p>
+            <a:pPr>
+              <a:lnSpc>
+                <a:spcPct val="135000"/>
+              </a:lnSpc>
+            </a:pPr>
+            <a:r>
+              <a:rPr sz="1250" b="0" i="0">
+                <a:solidFill>
+                  <a:srgbClr val="4A4843"/>
+                </a:solidFill>
+                <a:latin typeface="IBM Plex Sans"/>
+              </a:rPr>
+              <a:t>with its warning signs weakened to half strength the flag catches 4 of 6, at a quarter 1 of 6. A demonstration of the pipeline, not a clinical</a:t>
+            </a:r>
+          </a:p>
+          <a:p>
+            <a:pPr>
+              <a:lnSpc>
+                <a:spcPct val="135000"/>
+              </a:lnSpc>
+            </a:pPr>
+            <a:r>
+              <a:rPr sz="1250" b="0" i="0">
+                <a:solidFill>
+                  <a:srgbClr val="4A4843"/>
+                </a:solidFill>
+                <a:latin typeface="IBM Plex Sans"/>
+              </a:rPr>
+              <a:t>claim.</a:t>
             </a:r>
           </a:p>
         </p:txBody>
@@ -4611,7 +4643,7 @@
       </p:pic>
       <p:pic>
         <p:nvPicPr>
-          <p:cNvPr id="7" name="Picture 6" descr="06_note_ramesh.png"/>
+          <p:cNvPr id="7" name="Picture 6" descr="15_earlier_alerts.png"/>
           <p:cNvPicPr>
             <a:picLocks noChangeAspect="1"/>
           </p:cNvPicPr>
@@ -4626,7 +4658,7 @@
         <p:spPr>
           <a:xfrm>
             <a:off x="6263640" y="1325880"/>
-            <a:ext cx="5394960" cy="3558275"/>
+            <a:ext cx="5394960" cy="3452774"/>
           </a:xfrm>
           <a:prstGeom prst="rect">
             <a:avLst/>
@@ -4647,64 +4679,80 @@
         <p:spPr>
           <a:xfrm>
             <a:off x="548640" y="5074920"/>
-            <a:ext cx="5486400" cy="708660"/>
-          </a:xfrm>
-          <a:prstGeom prst="rect">
-            <a:avLst/>
-          </a:prstGeom>
-          <a:noFill/>
-        </p:spPr>
-        <p:txBody>
-          <a:bodyPr wrap="none" lIns="0" rIns="0" tIns="0" bIns="0">
-            <a:spAutoFit/>
-          </a:bodyPr>
-          <a:lstStyle/>
-          <a:p>
-            <a:pPr>
-              <a:lnSpc>
-                <a:spcPct val="135000"/>
-              </a:lnSpc>
-            </a:pPr>
-            <a:r>
-              <a:rPr sz="1200" b="0" i="0">
+            <a:ext cx="5486400" cy="880110"/>
+          </a:xfrm>
+          <a:prstGeom prst="rect">
+            <a:avLst/>
+          </a:prstGeom>
+          <a:noFill/>
+        </p:spPr>
+        <p:txBody>
+          <a:bodyPr wrap="none" lIns="0" rIns="0" tIns="0" bIns="0">
+            <a:spAutoFit/>
+          </a:bodyPr>
+          <a:lstStyle/>
+          <a:p>
+            <a:pPr>
+              <a:lnSpc>
+                <a:spcPct val="135000"/>
+              </a:lnSpc>
+            </a:pPr>
+            <a:r>
+              <a:rPr sz="1150" b="0" i="0">
                 <a:solidFill>
                   <a:srgbClr val="4A4843"/>
                 </a:solidFill>
                 <a:latin typeface="IBM Plex Sans"/>
               </a:rPr>
-              <a:t>1. Ward sorted by alerts, with what changed since the last look; acknowledge</a:t>
-            </a:r>
-          </a:p>
-          <a:p>
-            <a:pPr>
-              <a:lnSpc>
-                <a:spcPct val="135000"/>
-              </a:lnSpc>
-            </a:pPr>
-            <a:r>
-              <a:rPr sz="1200" b="0" i="0">
+              <a:t>1. Ward grouped by urgency, with why each alert fired; n opens the next unseen</a:t>
+            </a:r>
+          </a:p>
+          <a:p>
+            <a:pPr>
+              <a:lnSpc>
+                <a:spcPct val="135000"/>
+              </a:lnSpc>
+            </a:pPr>
+            <a:r>
+              <a:rPr sz="1150" b="0" i="0">
                 <a:solidFill>
                   <a:srgbClr val="4A4843"/>
                 </a:solidFill>
                 <a:latin typeface="IBM Plex Sans"/>
               </a:rPr>
-              <a:t>and snooze, with an audit trail. 2. Open the twin: forecast band, reasons,</a:t>
-            </a:r>
-          </a:p>
-          <a:p>
-            <a:pPr>
-              <a:lnSpc>
-                <a:spcPct val="135000"/>
-              </a:lnSpc>
-            </a:pPr>
-            <a:r>
-              <a:rPr sz="1200" b="0" i="0">
+              <a:t>alert. Load measured: 1.3 confident high alerts per patient per day, 94% came</a:t>
+            </a:r>
+          </a:p>
+          <a:p>
+            <a:pPr>
+              <a:lnSpc>
+                <a:spcPct val="135000"/>
+              </a:lnSpc>
+            </a:pPr>
+            <a:r>
+              <a:rPr sz="1150" b="0" i="0">
                 <a:solidFill>
                   <a:srgbClr val="4A4843"/>
                 </a:solidFill>
                 <a:latin typeface="IBM Plex Sans"/>
               </a:rPr>
-              <a:t>alert log, AGP; tell it about tonight's meal.</a:t>
+              <a:t>true. 2. The first action fits the alert: check now, call, book a review, try a</a:t>
+            </a:r>
+          </a:p>
+          <a:p>
+            <a:pPr>
+              <a:lnSpc>
+                <a:spcPct val="135000"/>
+              </a:lnSpc>
+            </a:pPr>
+            <a:r>
+              <a:rPr sz="1150" b="0" i="0">
+                <a:solidFill>
+                  <a:srgbClr val="4A4843"/>
+                </a:solidFill>
+                <a:latin typeface="IBM Plex Sans"/>
+              </a:rPr>
+              <a:t>change. Undo for 10 seconds.</a:t>
             </a:r>
           </a:p>
         </p:txBody>
@@ -4718,48 +4766,64 @@
         <p:spPr>
           <a:xfrm>
             <a:off x="6263640" y="5212080"/>
-            <a:ext cx="5394960" cy="502920"/>
-          </a:xfrm>
-          <a:prstGeom prst="rect">
-            <a:avLst/>
-          </a:prstGeom>
-          <a:noFill/>
-        </p:spPr>
-        <p:txBody>
-          <a:bodyPr wrap="none" lIns="0" rIns="0" tIns="0" bIns="0">
-            <a:spAutoFit/>
-          </a:bodyPr>
-          <a:lstStyle/>
-          <a:p>
-            <a:pPr>
-              <a:lnSpc>
-                <a:spcPct val="135000"/>
-              </a:lnSpc>
-            </a:pPr>
-            <a:r>
-              <a:rPr sz="1200" b="0" i="0">
+            <a:ext cx="5394960" cy="682942"/>
+          </a:xfrm>
+          <a:prstGeom prst="rect">
+            <a:avLst/>
+          </a:prstGeom>
+          <a:noFill/>
+        </p:spPr>
+        <p:txBody>
+          <a:bodyPr wrap="none" lIns="0" rIns="0" tIns="0" bIns="0">
+            <a:spAutoFit/>
+          </a:bodyPr>
+          <a:lstStyle/>
+          <a:p>
+            <a:pPr>
+              <a:lnSpc>
+                <a:spcPct val="135000"/>
+              </a:lnSpc>
+            </a:pPr>
+            <a:r>
+              <a:rPr sz="1150" b="0" i="0">
                 <a:solidFill>
                   <a:srgbClr val="4A4843"/>
                 </a:solidFill>
                 <a:latin typeface="IBM Plex Sans"/>
               </a:rPr>
-              <a:t>3. Rank the levers for this patient and share them in English, Hindi or</a:t>
-            </a:r>
-          </a:p>
-          <a:p>
-            <a:pPr>
-              <a:lnSpc>
-                <a:spcPct val="135000"/>
-              </a:lnSpc>
-            </a:pPr>
-            <a:r>
-              <a:rPr sz="1200" b="0" i="0">
+              <a:t>3. Every alert's outcome and what the team did; a week plan checked against</a:t>
+            </a:r>
+          </a:p>
+          <a:p>
+            <a:pPr>
+              <a:lnSpc>
+                <a:spcPct val="135000"/>
+              </a:lnSpc>
+            </a:pPr>
+            <a:r>
+              <a:rPr sz="1150" b="0" i="0">
                 <a:solidFill>
                   <a:srgbClr val="4A4843"/>
                 </a:solidFill>
                 <a:latin typeface="IBM Plex Sans"/>
               </a:rPr>
-              <a:t>Tamil. 4. One click SOAP note for the record.</a:t>
+              <a:t>what happened. 4. Shift handover, daily digest, SOAP note, patient view in</a:t>
+            </a:r>
+          </a:p>
+          <a:p>
+            <a:pPr>
+              <a:lnSpc>
+                <a:spcPct val="135000"/>
+              </a:lnSpc>
+            </a:pPr>
+            <a:r>
+              <a:rPr sz="1150" b="0" i="0">
+                <a:solidFill>
+                  <a:srgbClr val="4A4843"/>
+                </a:solidFill>
+                <a:latin typeface="IBM Plex Sans"/>
+              </a:rPr>
+              <a:t>English, Hindi or Tamil.</a:t>
             </a:r>
           </a:p>
         </p:txBody>
@@ -4951,7 +5015,7 @@
         <p:spPr>
           <a:xfrm>
             <a:off x="822960" y="1600200"/>
-            <a:ext cx="5120640" cy="2637472"/>
+            <a:ext cx="5120640" cy="3563302"/>
           </a:xfrm>
           <a:prstGeom prst="rect">
             <a:avLst/>
@@ -5024,7 +5088,7 @@
                 </a:solidFill>
                 <a:latin typeface="IBM Plex Sans"/>
               </a:rPr>
-              <a:t>•  Each record carries a consent artefact: purpose limited,</a:t>
+              <a:t>•  Consent on screen: the patient can withdraw glucose,</a:t>
             </a:r>
           </a:p>
           <a:p>
@@ -5040,7 +5104,7 @@
                 </a:solidFill>
                 <a:latin typeface="IBM Plex Sans"/>
               </a:rPr>
-              <a:t>   time bound, revocable.</a:t>
+              <a:t>   wearable or ABDM record sharing, and the service stops using</a:t>
             </a:r>
           </a:p>
           <a:p>
@@ -5056,6 +5120,22 @@
                 </a:solidFill>
                 <a:latin typeface="IBM Plex Sans"/>
               </a:rPr>
+              <a:t>   that source.</a:t>
+            </a:r>
+          </a:p>
+          <a:p>
+            <a:pPr>
+              <a:lnSpc>
+                <a:spcPct val="135000"/>
+              </a:lnSpc>
+            </a:pPr>
+            <a:r>
+              <a:rPr sz="1350" b="0" i="0">
+                <a:solidFill>
+                  <a:srgbClr val="1B1B19"/>
+                </a:solidFill>
+                <a:latin typeface="IBM Plex Sans"/>
+              </a:rPr>
               <a:t/>
             </a:r>
           </a:p>
@@ -5072,6 +5152,54 @@
                 </a:solidFill>
                 <a:latin typeface="IBM Plex Sans"/>
               </a:rPr>
+              <a:t>•  Roles checked by the service: doctor, nurse or health</a:t>
+            </a:r>
+          </a:p>
+          <a:p>
+            <a:pPr>
+              <a:lnSpc>
+                <a:spcPct val="135000"/>
+              </a:lnSpc>
+            </a:pPr>
+            <a:r>
+              <a:rPr sz="1350" b="0" i="0">
+                <a:solidFill>
+                  <a:srgbClr val="1B1B19"/>
+                </a:solidFill>
+                <a:latin typeface="IBM Plex Sans"/>
+              </a:rPr>
+              <a:t>   educator, patient. Every action and undo is audited.</a:t>
+            </a:r>
+          </a:p>
+          <a:p>
+            <a:pPr>
+              <a:lnSpc>
+                <a:spcPct val="135000"/>
+              </a:lnSpc>
+            </a:pPr>
+            <a:r>
+              <a:rPr sz="1350" b="0" i="0">
+                <a:solidFill>
+                  <a:srgbClr val="1B1B19"/>
+                </a:solidFill>
+                <a:latin typeface="IBM Plex Sans"/>
+              </a:rPr>
+              <a:t/>
+            </a:r>
+          </a:p>
+          <a:p>
+            <a:pPr>
+              <a:lnSpc>
+                <a:spcPct val="135000"/>
+              </a:lnSpc>
+            </a:pPr>
+            <a:r>
+              <a:rPr sz="1350" b="0" i="0">
+                <a:solidFill>
+                  <a:srgbClr val="1B1B19"/>
+                </a:solidFill>
+                <a:latin typeface="IBM Plex Sans"/>
+              </a:rPr>
               <a:t>•  Deployment design: on premises inference, no identifiers in</a:t>
             </a:r>
           </a:p>
@@ -5088,7 +5216,7 @@
                 </a:solidFill>
                 <a:latin typeface="IBM Plex Sans"/>
               </a:rPr>
-              <a:t>   model features, audit log, ABDM consent flow.</a:t>
+              <a:t>   model features, clinic single sign on.</a:t>
             </a:r>
           </a:p>
           <a:p>
@@ -5224,7 +5352,7 @@
         <p:spPr>
           <a:xfrm>
             <a:off x="6400800" y="2286000"/>
-            <a:ext cx="5029200" cy="2097405"/>
+            <a:ext cx="5029200" cy="2320290"/>
           </a:xfrm>
           <a:prstGeom prst="rect">
             <a:avLst/>
@@ -5297,7 +5425,23 @@
                 </a:solidFill>
                 <a:latin typeface="IBM Plex Sans"/>
               </a:rPr>
-              <a:t>•  Only 6 cardiovascular events in test patients.</a:t>
+              <a:t>•  Only 6 cardiovascular events in test patients, from our own</a:t>
+            </a:r>
+          </a:p>
+          <a:p>
+            <a:pPr>
+              <a:lnSpc>
+                <a:spcPct val="135000"/>
+              </a:lnSpc>
+            </a:pPr>
+            <a:r>
+              <a:rPr sz="1300" b="0" i="0">
+                <a:solidFill>
+                  <a:srgbClr val="4A4843"/>
+                </a:solidFill>
+                <a:latin typeface="IBM Plex Sans"/>
+              </a:rPr>
+              <a:t>   simulator; no real outcome validation yet.</a:t>
             </a:r>
           </a:p>
           <a:p>
@@ -9508,7 +9652,7 @@
         <p:spPr>
           <a:xfrm>
             <a:off x="6583680" y="1554480"/>
-            <a:ext cx="3721395" cy="4480560"/>
+            <a:ext cx="3518764" cy="4480560"/>
           </a:xfrm>
           <a:prstGeom prst="rect">
             <a:avLst/>

--- a/docs/presentation.pptx
+++ b/docs/presentation.pptx
@@ -4196,74 +4196,74 @@
         <p:spPr>
           <a:xfrm>
             <a:off x="7863840" y="1463040"/>
-            <a:ext cx="3840480" cy="3211830"/>
-          </a:xfrm>
-          <a:prstGeom prst="rect">
-            <a:avLst/>
-          </a:prstGeom>
-          <a:noFill/>
-        </p:spPr>
-        <p:txBody>
-          <a:bodyPr wrap="none" lIns="0" rIns="0" tIns="0" bIns="0">
-            <a:spAutoFit/>
-          </a:bodyPr>
-          <a:lstStyle/>
-          <a:p>
-            <a:pPr>
-              <a:lnSpc>
-                <a:spcPct val="135000"/>
-              </a:lnSpc>
-            </a:pPr>
-            <a:r>
-              <a:rPr sz="1300" b="0" i="0">
-                <a:solidFill>
-                  <a:srgbClr val="1B1B19"/>
-                </a:solidFill>
-                <a:latin typeface="IBM Plex Sans"/>
-              </a:rPr>
-              <a:t>•  19:45. The hybrid forecast expects dinner at</a:t>
-            </a:r>
-          </a:p>
-          <a:p>
-            <a:pPr>
-              <a:lnSpc>
-                <a:spcPct val="135000"/>
-              </a:lnSpc>
-            </a:pPr>
-            <a:r>
-              <a:rPr sz="1300" b="0" i="0">
-                <a:solidFill>
-                  <a:srgbClr val="1B1B19"/>
-                </a:solidFill>
-                <a:latin typeface="IBM Plex Sans"/>
-              </a:rPr>
-              <a:t>   20:15 and a peak near 278 mg/dL, after three</a:t>
-            </a:r>
-          </a:p>
-          <a:p>
-            <a:pPr>
-              <a:lnSpc>
-                <a:spcPct val="135000"/>
-              </a:lnSpc>
-            </a:pPr>
-            <a:r>
-              <a:rPr sz="1300" b="0" i="0">
-                <a:solidFill>
-                  <a:srgbClr val="1B1B19"/>
-                </a:solidFill>
-                <a:latin typeface="IBM Plex Sans"/>
-              </a:rPr>
-              <a:t>   nights of 4.9 h sleep.</a:t>
-            </a:r>
-          </a:p>
-          <a:p>
-            <a:pPr>
-              <a:lnSpc>
-                <a:spcPct val="135000"/>
-              </a:lnSpc>
-            </a:pPr>
-            <a:r>
-              <a:rPr sz="1300" b="0" i="0">
+            <a:ext cx="3840480" cy="4000500"/>
+          </a:xfrm>
+          <a:prstGeom prst="rect">
+            <a:avLst/>
+          </a:prstGeom>
+          <a:noFill/>
+        </p:spPr>
+        <p:txBody>
+          <a:bodyPr wrap="none" lIns="0" rIns="0" tIns="0" bIns="0">
+            <a:spAutoFit/>
+          </a:bodyPr>
+          <a:lstStyle/>
+          <a:p>
+            <a:pPr>
+              <a:lnSpc>
+                <a:spcPct val="135000"/>
+              </a:lnSpc>
+            </a:pPr>
+            <a:r>
+              <a:rPr sz="1200" b="0" i="0">
+                <a:solidFill>
+                  <a:srgbClr val="1B1B19"/>
+                </a:solidFill>
+                <a:latin typeface="IBM Plex Sans"/>
+              </a:rPr>
+              <a:t>•  19:45. The hybrid forecast expects dinner at 20:15</a:t>
+            </a:r>
+          </a:p>
+          <a:p>
+            <a:pPr>
+              <a:lnSpc>
+                <a:spcPct val="135000"/>
+              </a:lnSpc>
+            </a:pPr>
+            <a:r>
+              <a:rPr sz="1200" b="0" i="0">
+                <a:solidFill>
+                  <a:srgbClr val="1B1B19"/>
+                </a:solidFill>
+                <a:latin typeface="IBM Plex Sans"/>
+              </a:rPr>
+              <a:t>   and a peak near 278 mg/dL, after three nights of</a:t>
+            </a:r>
+          </a:p>
+          <a:p>
+            <a:pPr>
+              <a:lnSpc>
+                <a:spcPct val="135000"/>
+              </a:lnSpc>
+            </a:pPr>
+            <a:r>
+              <a:rPr sz="1200" b="0" i="0">
+                <a:solidFill>
+                  <a:srgbClr val="1B1B19"/>
+                </a:solidFill>
+                <a:latin typeface="IBM Plex Sans"/>
+              </a:rPr>
+              <a:t>   4.9 h sleep.</a:t>
+            </a:r>
+          </a:p>
+          <a:p>
+            <a:pPr>
+              <a:lnSpc>
+                <a:spcPct val="135000"/>
+              </a:lnSpc>
+            </a:pPr>
+            <a:r>
+              <a:rPr sz="1200" b="0" i="0">
                 <a:solidFill>
                   <a:srgbClr val="1B1B19"/>
                 </a:solidFill>
@@ -4279,55 +4279,55 @@
               </a:lnSpc>
             </a:pPr>
             <a:r>
-              <a:rPr sz="1300" b="0" i="0">
-                <a:solidFill>
-                  <a:srgbClr val="1B1B19"/>
-                </a:solidFill>
-                <a:latin typeface="IBM Plex Sans"/>
-              </a:rPr>
-              <a:t>•  A 15 minute walk after dinner takes 15 mg/dL</a:t>
-            </a:r>
-          </a:p>
-          <a:p>
-            <a:pPr>
-              <a:lnSpc>
-                <a:spcPct val="135000"/>
-              </a:lnSpc>
-            </a:pPr>
-            <a:r>
-              <a:rPr sz="1300" b="0" i="0">
-                <a:solidFill>
-                  <a:srgbClr val="1B1B19"/>
-                </a:solidFill>
-                <a:latin typeface="IBM Plex Sans"/>
-              </a:rPr>
-              <a:t>   off the twin's 6 hour peak. Millets instead of</a:t>
-            </a:r>
-          </a:p>
-          <a:p>
-            <a:pPr>
-              <a:lnSpc>
-                <a:spcPct val="135000"/>
-              </a:lnSpc>
-            </a:pPr>
-            <a:r>
-              <a:rPr sz="1300" b="0" i="0">
-                <a:solidFill>
-                  <a:srgbClr val="1B1B19"/>
-                </a:solidFill>
-                <a:latin typeface="IBM Plex Sans"/>
-              </a:rPr>
-              <a:t>   white rice take 48.</a:t>
-            </a:r>
-          </a:p>
-          <a:p>
-            <a:pPr>
-              <a:lnSpc>
-                <a:spcPct val="135000"/>
-              </a:lnSpc>
-            </a:pPr>
-            <a:r>
-              <a:rPr sz="1300" b="0" i="0">
+              <a:rPr sz="1200" b="0" i="0">
+                <a:solidFill>
+                  <a:srgbClr val="1B1B19"/>
+                </a:solidFill>
+                <a:latin typeface="IBM Plex Sans"/>
+              </a:rPr>
+              <a:t>•  A 15 minute walk after dinner takes 15 mg/dL off</a:t>
+            </a:r>
+          </a:p>
+          <a:p>
+            <a:pPr>
+              <a:lnSpc>
+                <a:spcPct val="135000"/>
+              </a:lnSpc>
+            </a:pPr>
+            <a:r>
+              <a:rPr sz="1200" b="0" i="0">
+                <a:solidFill>
+                  <a:srgbClr val="1B1B19"/>
+                </a:solidFill>
+                <a:latin typeface="IBM Plex Sans"/>
+              </a:rPr>
+              <a:t>   the twin's 6 hour peak. Millets instead of white</a:t>
+            </a:r>
+          </a:p>
+          <a:p>
+            <a:pPr>
+              <a:lnSpc>
+                <a:spcPct val="135000"/>
+              </a:lnSpc>
+            </a:pPr>
+            <a:r>
+              <a:rPr sz="1200" b="0" i="0">
+                <a:solidFill>
+                  <a:srgbClr val="1B1B19"/>
+                </a:solidFill>
+                <a:latin typeface="IBM Plex Sans"/>
+              </a:rPr>
+              <a:t>   rice take 48.</a:t>
+            </a:r>
+          </a:p>
+          <a:p>
+            <a:pPr>
+              <a:lnSpc>
+                <a:spcPct val="135000"/>
+              </a:lnSpc>
+            </a:pPr>
+            <a:r>
+              <a:rPr sz="1200" b="0" i="0">
                 <a:solidFill>
                   <a:srgbClr val="1B1B19"/>
                 </a:solidFill>
@@ -4343,39 +4343,39 @@
               </a:lnSpc>
             </a:pPr>
             <a:r>
-              <a:rPr sz="1300" b="0" i="0">
-                <a:solidFill>
-                  <a:srgbClr val="1B1B19"/>
-                </a:solidFill>
-                <a:latin typeface="IBM Plex Sans"/>
-              </a:rPr>
-              <a:t>•  Together: peak 57 mg/dL lower and 40 minutes</a:t>
-            </a:r>
-          </a:p>
-          <a:p>
-            <a:pPr>
-              <a:lnSpc>
-                <a:spcPct val="135000"/>
-              </a:lnSpc>
-            </a:pPr>
-            <a:r>
-              <a:rPr sz="1300" b="0" i="0">
-                <a:solidFill>
-                  <a:srgbClr val="1B1B19"/>
-                </a:solidFill>
-                <a:latin typeface="IBM Plex Sans"/>
-              </a:rPr>
-              <a:t>   less above 180.</a:t>
-            </a:r>
-          </a:p>
-          <a:p>
-            <a:pPr>
-              <a:lnSpc>
-                <a:spcPct val="135000"/>
-              </a:lnSpc>
-            </a:pPr>
-            <a:r>
-              <a:rPr sz="1300" b="0" i="0">
+              <a:rPr sz="1200" b="0" i="0">
+                <a:solidFill>
+                  <a:srgbClr val="1B1B19"/>
+                </a:solidFill>
+                <a:latin typeface="IBM Plex Sans"/>
+              </a:rPr>
+              <a:t>•  Together: peak 57 mg/dL lower and 40 minutes less</a:t>
+            </a:r>
+          </a:p>
+          <a:p>
+            <a:pPr>
+              <a:lnSpc>
+                <a:spcPct val="135000"/>
+              </a:lnSpc>
+            </a:pPr>
+            <a:r>
+              <a:rPr sz="1200" b="0" i="0">
+                <a:solidFill>
+                  <a:srgbClr val="1B1B19"/>
+                </a:solidFill>
+                <a:latin typeface="IBM Plex Sans"/>
+              </a:rPr>
+              <a:t>   above 180.</a:t>
+            </a:r>
+          </a:p>
+          <a:p>
+            <a:pPr>
+              <a:lnSpc>
+                <a:spcPct val="135000"/>
+              </a:lnSpc>
+            </a:pPr>
+            <a:r>
+              <a:rPr sz="1200" b="0" i="0">
                 <a:solidFill>
                   <a:srgbClr val="1B1B19"/>
                 </a:solidFill>
@@ -4391,7 +4391,7 @@
               </a:lnSpc>
             </a:pPr>
             <a:r>
-              <a:rPr sz="1300" b="0" i="0">
+              <a:rPr sz="1200" b="0" i="0">
                 <a:solidFill>
                   <a:srgbClr val="1B1B19"/>
                 </a:solidFill>
@@ -4407,29 +4407,109 @@
               </a:lnSpc>
             </a:pPr>
             <a:r>
-              <a:rPr sz="1300" b="0" i="0">
-                <a:solidFill>
-                  <a:srgbClr val="1B1B19"/>
-                </a:solidFill>
-                <a:latin typeface="IBM Plex Sans"/>
-              </a:rPr>
-              <a:t>   tonight (it can only move to 19:50). The twin</a:t>
-            </a:r>
-          </a:p>
-          <a:p>
-            <a:pPr>
-              <a:lnSpc>
-                <a:spcPct val="135000"/>
-              </a:lnSpc>
-            </a:pPr>
-            <a:r>
-              <a:rPr sz="1300" b="0" i="0">
-                <a:solidFill>
-                  <a:srgbClr val="1B1B19"/>
-                </a:solidFill>
-                <a:latin typeface="IBM Plex Sans"/>
-              </a:rPr>
-              <a:t>   can say no.</a:t>
+              <a:rPr sz="1200" b="0" i="0">
+                <a:solidFill>
+                  <a:srgbClr val="1B1B19"/>
+                </a:solidFill>
+                <a:latin typeface="IBM Plex Sans"/>
+              </a:rPr>
+              <a:t>   tonight (it can only move to 19:50). The twin can</a:t>
+            </a:r>
+          </a:p>
+          <a:p>
+            <a:pPr>
+              <a:lnSpc>
+                <a:spcPct val="135000"/>
+              </a:lnSpc>
+            </a:pPr>
+            <a:r>
+              <a:rPr sz="1200" b="0" i="0">
+                <a:solidFill>
+                  <a:srgbClr val="1B1B19"/>
+                </a:solidFill>
+                <a:latin typeface="IBM Plex Sans"/>
+              </a:rPr>
+              <a:t>   say no.</a:t>
+            </a:r>
+          </a:p>
+          <a:p>
+            <a:pPr>
+              <a:lnSpc>
+                <a:spcPct val="135000"/>
+              </a:lnSpc>
+            </a:pPr>
+            <a:r>
+              <a:rPr sz="1200" b="0" i="0">
+                <a:solidFill>
+                  <a:srgbClr val="1B1B19"/>
+                </a:solidFill>
+                <a:latin typeface="IBM Plex Sans"/>
+              </a:rPr>
+              <a:t/>
+            </a:r>
+          </a:p>
+          <a:p>
+            <a:pPr>
+              <a:lnSpc>
+                <a:spcPct val="135000"/>
+              </a:lnSpc>
+            </a:pPr>
+            <a:r>
+              <a:rPr sz="1200" b="0" i="0">
+                <a:solidFill>
+                  <a:srgbClr val="1B1B19"/>
+                </a:solidFill>
+                <a:latin typeface="IBM Plex Sans"/>
+              </a:rPr>
+              <a:t>•  Checked against the reference simulator the twin</a:t>
+            </a:r>
+          </a:p>
+          <a:p>
+            <a:pPr>
+              <a:lnSpc>
+                <a:spcPct val="135000"/>
+              </a:lnSpc>
+            </a:pPr>
+            <a:r>
+              <a:rPr sz="1200" b="0" i="0">
+                <a:solidFill>
+                  <a:srgbClr val="1B1B19"/>
+                </a:solidFill>
+                <a:latin typeface="IBM Plex Sans"/>
+              </a:rPr>
+              <a:t>   never sees: across 316 moments in 40 test patients</a:t>
+            </a:r>
+          </a:p>
+          <a:p>
+            <a:pPr>
+              <a:lnSpc>
+                <a:spcPct val="135000"/>
+              </a:lnSpc>
+            </a:pPr>
+            <a:r>
+              <a:rPr sz="1200" b="0" i="0">
+                <a:solidFill>
+                  <a:srgbClr val="1B1B19"/>
+                </a:solidFill>
+                <a:latin typeface="IBM Plex Sans"/>
+              </a:rPr>
+              <a:t>   the twin gets the direction of a change right 76%</a:t>
+            </a:r>
+          </a:p>
+          <a:p>
+            <a:pPr>
+              <a:lnSpc>
+                <a:spcPct val="135000"/>
+              </a:lnSpc>
+            </a:pPr>
+            <a:r>
+              <a:rPr sz="1200" b="0" i="0">
+                <a:solidFill>
+                  <a:srgbClr val="1B1B19"/>
+                </a:solidFill>
+                <a:latin typeface="IBM Plex Sans"/>
+              </a:rPr>
+              <a:t>   of the time.</a:t>
             </a:r>
           </a:p>
         </p:txBody>
@@ -4643,7 +4723,7 @@
       </p:pic>
       <p:pic>
         <p:nvPicPr>
-          <p:cNvPr id="7" name="Picture 6" descr="15_earlier_alerts.png"/>
+          <p:cNvPr id="7" name="Picture 6" descr="25_phone_loop.png"/>
           <p:cNvPicPr>
             <a:picLocks noChangeAspect="1"/>
           </p:cNvPicPr>
@@ -4791,7 +4871,7 @@
                 </a:solidFill>
                 <a:latin typeface="IBM Plex Sans"/>
               </a:rPr>
-              <a:t>3. Every alert's outcome and what the team did; a week plan checked against</a:t>
+              <a:t>3. A suggestion to the patient's phone in Hindi, Tamil or English; the reply</a:t>
             </a:r>
           </a:p>
           <a:p>
@@ -4807,7 +4887,7 @@
                 </a:solidFill>
                 <a:latin typeface="IBM Plex Sans"/>
               </a:rPr>
-              <a:t>what happened. 4. Shift handover, daily digest, SOAP note, patient view in</a:t>
+              <a:t>enters the forecast and the outcome comes back to both sides. 4. Every alert's</a:t>
             </a:r>
           </a:p>
           <a:p>
@@ -4823,7 +4903,7 @@
                 </a:solidFill>
                 <a:latin typeface="IBM Plex Sans"/>
               </a:rPr>
-              <a:t>English, Hindi or Tamil.</a:t>
+              <a:t>outcome, week plans checked a week later, handover, festival planner.</a:t>
             </a:r>
           </a:p>
         </p:txBody>
@@ -9652,7 +9732,7 @@
         <p:spPr>
           <a:xfrm>
             <a:off x="6583680" y="1554480"/>
-            <a:ext cx="3518764" cy="4480560"/>
+            <a:ext cx="3082954" cy="4480560"/>
           </a:xfrm>
           <a:prstGeom prst="rect">
             <a:avLst/>

--- a/docs/presentation.pptx
+++ b/docs/presentation.pptx
@@ -3335,7 +3335,7 @@
                 </a:solidFill>
                 <a:latin typeface="IBM Plex Sans"/>
               </a:rPr>
-              <a:t>&lt;TeamName&gt;, &lt;CollegeName&gt; / &lt;Incubator&gt;</a:t>
+              <a:t>Team pushkalayeddula, Anurag University</a:t>
             </a:r>
           </a:p>
         </p:txBody>
@@ -3374,7 +3374,7 @@
                 </a:solidFill>
                 <a:latin typeface="IBM Plex Sans"/>
               </a:rPr>
-              <a:t>&lt;Member 1, role&gt;   &lt;Member 2, role&gt;   &lt;Member 3, role&gt;   &lt;Member 4, role&gt;   &lt;team email&gt;</a:t>
+              <a:t>Built by Pushkala Yeddula: data, twin, models, dashboard, tests and documents</a:t>
             </a:r>
           </a:p>
         </p:txBody>
